--- a/resources/Ecosystem.pptx
+++ b/resources/Ecosystem.pptx
@@ -243,7 +243,7 @@
           <a:p>
             <a:fld id="{3FB75DC4-049D-4A9B-B286-BF003F86F273}" type="datetimeFigureOut">
               <a:rPr lang="en-GB" smtClean="0"/>
-              <a:t>25/10/2021</a:t>
+              <a:t>30/10/2021</a:t>
             </a:fld>
             <a:endParaRPr lang="en-GB" dirty="0"/>
           </a:p>
@@ -413,7 +413,7 @@
           <a:p>
             <a:fld id="{3FB75DC4-049D-4A9B-B286-BF003F86F273}" type="datetimeFigureOut">
               <a:rPr lang="en-GB" smtClean="0"/>
-              <a:t>25/10/2021</a:t>
+              <a:t>30/10/2021</a:t>
             </a:fld>
             <a:endParaRPr lang="en-GB" dirty="0"/>
           </a:p>
@@ -593,7 +593,7 @@
           <a:p>
             <a:fld id="{3FB75DC4-049D-4A9B-B286-BF003F86F273}" type="datetimeFigureOut">
               <a:rPr lang="en-GB" smtClean="0"/>
-              <a:t>25/10/2021</a:t>
+              <a:t>30/10/2021</a:t>
             </a:fld>
             <a:endParaRPr lang="en-GB" dirty="0"/>
           </a:p>
@@ -763,7 +763,7 @@
           <a:p>
             <a:fld id="{3FB75DC4-049D-4A9B-B286-BF003F86F273}" type="datetimeFigureOut">
               <a:rPr lang="en-GB" smtClean="0"/>
-              <a:t>25/10/2021</a:t>
+              <a:t>30/10/2021</a:t>
             </a:fld>
             <a:endParaRPr lang="en-GB" dirty="0"/>
           </a:p>
@@ -1009,7 +1009,7 @@
           <a:p>
             <a:fld id="{3FB75DC4-049D-4A9B-B286-BF003F86F273}" type="datetimeFigureOut">
               <a:rPr lang="en-GB" smtClean="0"/>
-              <a:t>25/10/2021</a:t>
+              <a:t>30/10/2021</a:t>
             </a:fld>
             <a:endParaRPr lang="en-GB" dirty="0"/>
           </a:p>
@@ -1241,7 +1241,7 @@
           <a:p>
             <a:fld id="{3FB75DC4-049D-4A9B-B286-BF003F86F273}" type="datetimeFigureOut">
               <a:rPr lang="en-GB" smtClean="0"/>
-              <a:t>25/10/2021</a:t>
+              <a:t>30/10/2021</a:t>
             </a:fld>
             <a:endParaRPr lang="en-GB" dirty="0"/>
           </a:p>
@@ -1608,7 +1608,7 @@
           <a:p>
             <a:fld id="{3FB75DC4-049D-4A9B-B286-BF003F86F273}" type="datetimeFigureOut">
               <a:rPr lang="en-GB" smtClean="0"/>
-              <a:t>25/10/2021</a:t>
+              <a:t>30/10/2021</a:t>
             </a:fld>
             <a:endParaRPr lang="en-GB" dirty="0"/>
           </a:p>
@@ -1726,7 +1726,7 @@
           <a:p>
             <a:fld id="{3FB75DC4-049D-4A9B-B286-BF003F86F273}" type="datetimeFigureOut">
               <a:rPr lang="en-GB" smtClean="0"/>
-              <a:t>25/10/2021</a:t>
+              <a:t>30/10/2021</a:t>
             </a:fld>
             <a:endParaRPr lang="en-GB" dirty="0"/>
           </a:p>
@@ -1821,7 +1821,7 @@
           <a:p>
             <a:fld id="{3FB75DC4-049D-4A9B-B286-BF003F86F273}" type="datetimeFigureOut">
               <a:rPr lang="en-GB" smtClean="0"/>
-              <a:t>25/10/2021</a:t>
+              <a:t>30/10/2021</a:t>
             </a:fld>
             <a:endParaRPr lang="en-GB" dirty="0"/>
           </a:p>
@@ -2098,7 +2098,7 @@
           <a:p>
             <a:fld id="{3FB75DC4-049D-4A9B-B286-BF003F86F273}" type="datetimeFigureOut">
               <a:rPr lang="en-GB" smtClean="0"/>
-              <a:t>25/10/2021</a:t>
+              <a:t>30/10/2021</a:t>
             </a:fld>
             <a:endParaRPr lang="en-GB" dirty="0"/>
           </a:p>
@@ -2351,7 +2351,7 @@
           <a:p>
             <a:fld id="{3FB75DC4-049D-4A9B-B286-BF003F86F273}" type="datetimeFigureOut">
               <a:rPr lang="en-GB" smtClean="0"/>
-              <a:t>25/10/2021</a:t>
+              <a:t>30/10/2021</a:t>
             </a:fld>
             <a:endParaRPr lang="en-GB" dirty="0"/>
           </a:p>
@@ -2564,7 +2564,7 @@
           <a:p>
             <a:fld id="{3FB75DC4-049D-4A9B-B286-BF003F86F273}" type="datetimeFigureOut">
               <a:rPr lang="en-GB" smtClean="0"/>
-              <a:t>25/10/2021</a:t>
+              <a:t>30/10/2021</a:t>
             </a:fld>
             <a:endParaRPr lang="en-GB" dirty="0"/>
           </a:p>
@@ -3002,7 +3002,7 @@
         </p:blipFill>
         <p:spPr>
           <a:xfrm>
-            <a:off x="8803032" y="2327997"/>
+            <a:off x="8803032" y="2099397"/>
             <a:ext cx="640967" cy="703453"/>
           </a:xfrm>
           <a:prstGeom prst="rect">
@@ -3033,7 +3033,7 @@
         </p:blipFill>
         <p:spPr bwMode="auto">
           <a:xfrm>
-            <a:off x="5384126" y="2980642"/>
+            <a:off x="5384126" y="2752042"/>
             <a:ext cx="487736" cy="487736"/>
           </a:xfrm>
           <a:prstGeom prst="rect">
@@ -3059,8 +3059,8 @@
         </p:nvSpPr>
         <p:spPr>
           <a:xfrm>
-            <a:off x="4923314" y="3446015"/>
-            <a:ext cx="1409360" cy="261610"/>
+            <a:off x="5086018" y="3210868"/>
+            <a:ext cx="1083951" cy="215444"/>
           </a:xfrm>
           <a:prstGeom prst="rect">
             <a:avLst/>
@@ -3074,14 +3074,14 @@
           <a:lstStyle/>
           <a:p>
             <a:r>
-              <a:rPr lang="de-DE" sz="1100" dirty="0" smtClean="0">
+              <a:rPr lang="de-DE" sz="800" dirty="0" smtClean="0">
                 <a:solidFill>
                   <a:schemeClr val="bg1"/>
                 </a:solidFill>
               </a:rPr>
               <a:t>nighttime-imaging.eu</a:t>
             </a:r>
-            <a:endParaRPr lang="en-GB" sz="1100" dirty="0">
+            <a:endParaRPr lang="en-GB" sz="800" dirty="0">
               <a:solidFill>
                 <a:schemeClr val="bg1"/>
               </a:solidFill>
@@ -3112,7 +3112,7 @@
         </p:blipFill>
         <p:spPr bwMode="auto">
           <a:xfrm>
-            <a:off x="2002098" y="3492605"/>
+            <a:off x="2002098" y="3264005"/>
             <a:ext cx="498322" cy="498322"/>
           </a:xfrm>
           <a:prstGeom prst="rect">
@@ -3138,8 +3138,8 @@
         </p:nvSpPr>
         <p:spPr>
           <a:xfrm>
-            <a:off x="2002098" y="5961033"/>
-            <a:ext cx="484428" cy="261610"/>
+            <a:off x="2050723" y="5408483"/>
+            <a:ext cx="401072" cy="215444"/>
           </a:xfrm>
           <a:prstGeom prst="rect">
             <a:avLst/>
@@ -3153,14 +3153,14 @@
           <a:lstStyle/>
           <a:p>
             <a:r>
-              <a:rPr lang="de-DE" sz="1100" dirty="0" smtClean="0">
+              <a:rPr lang="de-DE" sz="800" dirty="0" smtClean="0">
                 <a:solidFill>
                   <a:schemeClr val="bg1"/>
                 </a:solidFill>
               </a:rPr>
               <a:t>NINA</a:t>
             </a:r>
-            <a:endParaRPr lang="en-GB" sz="1400" dirty="0">
+            <a:endParaRPr lang="en-GB" sz="1000" dirty="0">
               <a:solidFill>
                 <a:schemeClr val="bg1"/>
               </a:solidFill>
@@ -3176,7 +3176,7 @@
         </p:nvSpPr>
         <p:spPr>
           <a:xfrm>
-            <a:off x="3292635" y="4729436"/>
+            <a:off x="3292635" y="4500836"/>
             <a:ext cx="627095" cy="215444"/>
           </a:xfrm>
           <a:prstGeom prst="rect">
@@ -3229,7 +3229,7 @@
         </p:blipFill>
         <p:spPr bwMode="auto">
           <a:xfrm>
-            <a:off x="3359674" y="2460178"/>
+            <a:off x="3359674" y="2231578"/>
             <a:ext cx="476060" cy="476060"/>
           </a:xfrm>
           <a:prstGeom prst="rect">
@@ -3255,7 +3255,7 @@
         </p:nvSpPr>
         <p:spPr>
           <a:xfrm>
-            <a:off x="3025385" y="2902482"/>
+            <a:off x="3025385" y="2673882"/>
             <a:ext cx="1124026" cy="215444"/>
           </a:xfrm>
           <a:prstGeom prst="rect">
@@ -3293,7 +3293,7 @@
         </p:nvSpPr>
         <p:spPr>
           <a:xfrm>
-            <a:off x="1720954" y="1375250"/>
+            <a:off x="1720954" y="1146650"/>
             <a:ext cx="1106393" cy="215444"/>
           </a:xfrm>
           <a:prstGeom prst="rect">
@@ -3346,7 +3346,7 @@
         </p:blipFill>
         <p:spPr bwMode="auto">
           <a:xfrm>
-            <a:off x="431125" y="3513261"/>
+            <a:off x="431125" y="3284661"/>
             <a:ext cx="476060" cy="476060"/>
           </a:xfrm>
           <a:prstGeom prst="rect">
@@ -3387,7 +3387,7 @@
         </p:blipFill>
         <p:spPr bwMode="auto">
           <a:xfrm>
-            <a:off x="2036121" y="933922"/>
+            <a:off x="2036121" y="705322"/>
             <a:ext cx="476060" cy="476060"/>
           </a:xfrm>
           <a:prstGeom prst="rect">
@@ -3428,7 +3428,7 @@
         </p:blipFill>
         <p:spPr bwMode="auto">
           <a:xfrm>
-            <a:off x="3373155" y="4264018"/>
+            <a:off x="3373155" y="4035418"/>
             <a:ext cx="476060" cy="476060"/>
           </a:xfrm>
           <a:prstGeom prst="rect">
@@ -3469,7 +3469,7 @@
         </p:blipFill>
         <p:spPr bwMode="auto">
           <a:xfrm>
-            <a:off x="2004822" y="5490964"/>
+            <a:off x="2004822" y="4938259"/>
             <a:ext cx="476060" cy="476060"/>
           </a:xfrm>
           <a:prstGeom prst="rect">
@@ -3510,7 +3510,7 @@
         </p:blipFill>
         <p:spPr bwMode="auto">
           <a:xfrm>
-            <a:off x="6941985" y="5474894"/>
+            <a:off x="6941985" y="4922189"/>
             <a:ext cx="462900" cy="462900"/>
           </a:xfrm>
           <a:prstGeom prst="rect">
@@ -3551,7 +3551,7 @@
         </p:blipFill>
         <p:spPr bwMode="auto">
           <a:xfrm>
-            <a:off x="6871422" y="2441557"/>
+            <a:off x="6871422" y="2212957"/>
             <a:ext cx="590761" cy="507523"/>
           </a:xfrm>
           <a:prstGeom prst="rect">
@@ -3577,7 +3577,7 @@
         </p:nvSpPr>
         <p:spPr>
           <a:xfrm>
-            <a:off x="6739441" y="2901946"/>
+            <a:off x="6739441" y="2673346"/>
             <a:ext cx="854721" cy="261610"/>
           </a:xfrm>
           <a:prstGeom prst="rect">
@@ -3618,8 +3618,8 @@
         </p:nvCxnSpPr>
         <p:spPr>
           <a:xfrm>
-            <a:off x="7166802" y="3163556"/>
-            <a:ext cx="6633" cy="2311338"/>
+            <a:off x="7166802" y="2934956"/>
+            <a:ext cx="6633" cy="1987233"/>
           </a:xfrm>
           <a:prstGeom prst="straightConnector1">
             <a:avLst/>
@@ -3654,7 +3654,7 @@
         </p:nvCxnSpPr>
         <p:spPr>
           <a:xfrm flipH="1">
-            <a:off x="7462183" y="2679724"/>
+            <a:off x="7462183" y="2451124"/>
             <a:ext cx="1340849" cy="15595"/>
           </a:xfrm>
           <a:prstGeom prst="straightConnector1">
@@ -3687,7 +3687,7 @@
         </p:nvSpPr>
         <p:spPr>
           <a:xfrm>
-            <a:off x="7712646" y="2520628"/>
+            <a:off x="7712646" y="2292028"/>
             <a:ext cx="894797" cy="461665"/>
           </a:xfrm>
           <a:prstGeom prst="rect">
@@ -3763,7 +3763,7 @@
         </p:nvCxnSpPr>
         <p:spPr>
           <a:xfrm flipV="1">
-            <a:off x="5871862" y="2839493"/>
+            <a:off x="5871862" y="2610893"/>
             <a:ext cx="999560" cy="385017"/>
           </a:xfrm>
           <a:prstGeom prst="straightConnector1">
@@ -3810,7 +3810,7 @@
         </p:blipFill>
         <p:spPr>
           <a:xfrm>
-            <a:off x="6984422" y="995673"/>
+            <a:off x="6984422" y="767073"/>
             <a:ext cx="378025" cy="378025"/>
           </a:xfrm>
           <a:prstGeom prst="rect">
@@ -3829,7 +3829,7 @@
         </p:nvCxnSpPr>
         <p:spPr>
           <a:xfrm flipV="1">
-            <a:off x="7166803" y="1373698"/>
+            <a:off x="7166803" y="1145098"/>
             <a:ext cx="6632" cy="1067859"/>
           </a:xfrm>
           <a:prstGeom prst="straightConnector1">
@@ -3862,7 +3862,7 @@
         </p:nvSpPr>
         <p:spPr>
           <a:xfrm>
-            <a:off x="6622642" y="807743"/>
+            <a:off x="6622642" y="579143"/>
             <a:ext cx="1101584" cy="215444"/>
           </a:xfrm>
           <a:prstGeom prst="rect">
@@ -3882,23 +3882,7 @@
                   <a:schemeClr val="bg1"/>
                 </a:solidFill>
               </a:rPr>
-              <a:t>3rd </a:t>
-            </a:r>
-            <a:r>
-              <a:rPr lang="de-DE" sz="800" dirty="0" smtClean="0">
-                <a:solidFill>
-                  <a:schemeClr val="bg1"/>
-                </a:solidFill>
-              </a:rPr>
-              <a:t>Party </a:t>
-            </a:r>
-            <a:r>
-              <a:rPr lang="de-DE" sz="800" dirty="0" smtClean="0">
-                <a:solidFill>
-                  <a:schemeClr val="bg1"/>
-                </a:solidFill>
-              </a:rPr>
-              <a:t>Plugin Hosts</a:t>
+              <a:t>3rd Party Plugin Hosts</a:t>
             </a:r>
             <a:endParaRPr lang="en-GB" sz="1000" dirty="0">
               <a:solidFill>
@@ -3916,7 +3900,7 @@
         </p:nvSpPr>
         <p:spPr>
           <a:xfrm>
-            <a:off x="6629634" y="5932138"/>
+            <a:off x="6629634" y="5379433"/>
             <a:ext cx="1074333" cy="215444"/>
           </a:xfrm>
           <a:prstGeom prst="rect">
@@ -3969,7 +3953,7 @@
         </p:blipFill>
         <p:spPr bwMode="auto">
           <a:xfrm>
-            <a:off x="5402178" y="4312421"/>
+            <a:off x="5402178" y="4083821"/>
             <a:ext cx="458175" cy="392113"/>
           </a:xfrm>
           <a:prstGeom prst="rect">
@@ -3995,8 +3979,8 @@
         </p:nvSpPr>
         <p:spPr>
           <a:xfrm>
-            <a:off x="5090827" y="4744328"/>
-            <a:ext cx="1074333" cy="261610"/>
+            <a:off x="5214670" y="4516178"/>
+            <a:ext cx="837089" cy="215444"/>
           </a:xfrm>
           <a:prstGeom prst="rect">
             <a:avLst/>
@@ -4010,7 +3994,7 @@
           <a:lstStyle/>
           <a:p>
             <a:r>
-              <a:rPr lang="de-DE" sz="1100" dirty="0" smtClean="0">
+              <a:rPr lang="de-DE" sz="800" dirty="0" smtClean="0">
                 <a:solidFill>
                   <a:schemeClr val="bg1"/>
                 </a:solidFill>
@@ -4036,7 +4020,7 @@
         </p:nvCxnSpPr>
         <p:spPr>
           <a:xfrm>
-            <a:off x="3849215" y="4502048"/>
+            <a:off x="3849215" y="4273448"/>
             <a:ext cx="1552963" cy="6430"/>
           </a:xfrm>
           <a:prstGeom prst="straightConnector1">
@@ -4069,7 +4053,7 @@
         </p:nvSpPr>
         <p:spPr>
           <a:xfrm>
-            <a:off x="4264790" y="4491541"/>
+            <a:off x="4264790" y="4262941"/>
             <a:ext cx="623889" cy="215444"/>
           </a:xfrm>
           <a:prstGeom prst="rect">
@@ -4122,7 +4106,7 @@
         </p:blipFill>
         <p:spPr bwMode="auto">
           <a:xfrm>
-            <a:off x="494097" y="2588241"/>
+            <a:off x="494097" y="2359641"/>
             <a:ext cx="354883" cy="354883"/>
           </a:xfrm>
           <a:prstGeom prst="rect">
@@ -4148,7 +4132,7 @@
         </p:nvSpPr>
         <p:spPr>
           <a:xfrm>
-            <a:off x="376556" y="3960281"/>
+            <a:off x="376556" y="3731681"/>
             <a:ext cx="570990" cy="215444"/>
           </a:xfrm>
           <a:prstGeom prst="rect">
@@ -4189,7 +4173,7 @@
         </p:nvCxnSpPr>
         <p:spPr>
           <a:xfrm flipV="1">
-            <a:off x="669155" y="2943124"/>
+            <a:off x="669155" y="2714524"/>
             <a:ext cx="2384" cy="570137"/>
           </a:xfrm>
           <a:prstGeom prst="straightConnector1">
@@ -4225,7 +4209,7 @@
         </p:nvCxnSpPr>
         <p:spPr>
           <a:xfrm flipV="1">
-            <a:off x="671539" y="2085913"/>
+            <a:off x="671539" y="1857313"/>
             <a:ext cx="9013" cy="502328"/>
           </a:xfrm>
           <a:prstGeom prst="straightConnector1">
@@ -4273,7 +4257,7 @@
         </p:blipFill>
         <p:spPr bwMode="auto">
           <a:xfrm>
-            <a:off x="393297" y="1665196"/>
+            <a:off x="393297" y="1436596"/>
             <a:ext cx="574509" cy="420717"/>
           </a:xfrm>
           <a:prstGeom prst="rect">
@@ -4302,7 +4286,7 @@
         </p:nvCxnSpPr>
         <p:spPr>
           <a:xfrm flipV="1">
-            <a:off x="2480882" y="5706344"/>
+            <a:off x="2480882" y="5153639"/>
             <a:ext cx="4461103" cy="22650"/>
           </a:xfrm>
           <a:prstGeom prst="straightConnector1">
@@ -4335,7 +4319,7 @@
         </p:nvSpPr>
         <p:spPr>
           <a:xfrm>
-            <a:off x="3359674" y="5677156"/>
+            <a:off x="3359674" y="5124451"/>
             <a:ext cx="1034257" cy="215444"/>
           </a:xfrm>
           <a:prstGeom prst="rect">
@@ -4376,7 +4360,7 @@
         </p:nvCxnSpPr>
         <p:spPr>
           <a:xfrm flipV="1">
-            <a:off x="3835734" y="2695319"/>
+            <a:off x="3835734" y="2466719"/>
             <a:ext cx="3035688" cy="2889"/>
           </a:xfrm>
           <a:prstGeom prst="straightConnector1">
@@ -4409,7 +4393,7 @@
         </p:nvSpPr>
         <p:spPr>
           <a:xfrm>
-            <a:off x="4576735" y="2687116"/>
+            <a:off x="4576735" y="2458516"/>
             <a:ext cx="623889" cy="215444"/>
           </a:xfrm>
           <a:prstGeom prst="rect">
@@ -4449,7 +4433,7 @@
         </p:nvCxnSpPr>
         <p:spPr>
           <a:xfrm>
-            <a:off x="2499587" y="3997242"/>
+            <a:off x="2499587" y="3768642"/>
             <a:ext cx="873568" cy="504806"/>
           </a:xfrm>
           <a:prstGeom prst="straightConnector1">
@@ -4484,7 +4468,7 @@
         </p:nvCxnSpPr>
         <p:spPr>
           <a:xfrm flipV="1">
-            <a:off x="2500420" y="2698208"/>
+            <a:off x="2500420" y="2469608"/>
             <a:ext cx="859254" cy="788082"/>
           </a:xfrm>
           <a:prstGeom prst="straightConnector1">
@@ -4520,7 +4504,7 @@
         </p:nvCxnSpPr>
         <p:spPr>
           <a:xfrm flipV="1">
-            <a:off x="2251259" y="1590694"/>
+            <a:off x="2251259" y="1362094"/>
             <a:ext cx="22892" cy="1901911"/>
           </a:xfrm>
           <a:prstGeom prst="straightConnector1">
@@ -4556,7 +4540,7 @@
         </p:nvCxnSpPr>
         <p:spPr>
           <a:xfrm flipH="1">
-            <a:off x="907185" y="3741766"/>
+            <a:off x="907185" y="3513166"/>
             <a:ext cx="1094913" cy="9525"/>
           </a:xfrm>
           <a:prstGeom prst="straightConnector1">
@@ -4585,14 +4569,15 @@
         <p:nvCxnSpPr>
           <p:cNvPr id="78" name="Gerade Verbindung mit Pfeil 77"/>
           <p:cNvCxnSpPr>
+            <a:stCxn id="1034" idx="2"/>
             <a:endCxn id="25" idx="0"/>
           </p:cNvCxnSpPr>
           <p:nvPr/>
         </p:nvCxnSpPr>
         <p:spPr>
           <a:xfrm flipH="1">
-            <a:off x="2242852" y="3989321"/>
-            <a:ext cx="7572" cy="1501643"/>
+            <a:off x="2242852" y="3762327"/>
+            <a:ext cx="8407" cy="1175932"/>
           </a:xfrm>
           <a:prstGeom prst="straightConnector1">
             <a:avLst/>
@@ -4624,7 +4609,7 @@
         </p:nvCxnSpPr>
         <p:spPr>
           <a:xfrm>
-            <a:off x="7307845" y="1326599"/>
+            <a:off x="7307845" y="1097999"/>
             <a:ext cx="1492296" cy="1001398"/>
           </a:xfrm>
           <a:prstGeom prst="straightConnector1">
@@ -4657,7 +4642,7 @@
         </p:nvSpPr>
         <p:spPr>
           <a:xfrm>
-            <a:off x="7971015" y="4383819"/>
+            <a:off x="7971015" y="4155219"/>
             <a:ext cx="522900" cy="215444"/>
           </a:xfrm>
           <a:prstGeom prst="rect">
@@ -4691,14 +4676,15 @@
         <p:nvCxnSpPr>
           <p:cNvPr id="1035" name="Gerade Verbindung mit Pfeil 1034"/>
           <p:cNvCxnSpPr>
+            <a:stCxn id="8" idx="2"/>
             <a:endCxn id="1046" idx="0"/>
           </p:cNvCxnSpPr>
           <p:nvPr/>
         </p:nvCxnSpPr>
         <p:spPr>
           <a:xfrm>
-            <a:off x="5627994" y="3725139"/>
-            <a:ext cx="3272" cy="587282"/>
+            <a:off x="5627994" y="3426312"/>
+            <a:ext cx="3272" cy="657509"/>
           </a:xfrm>
           <a:prstGeom prst="straightConnector1">
             <a:avLst/>
@@ -4725,13 +4711,15 @@
       <p:cxnSp>
         <p:nvCxnSpPr>
           <p:cNvPr id="1051" name="Gerade Verbindung mit Pfeil 1050"/>
-          <p:cNvCxnSpPr/>
+          <p:cNvCxnSpPr>
+            <a:stCxn id="1038" idx="3"/>
+          </p:cNvCxnSpPr>
           <p:nvPr/>
         </p:nvCxnSpPr>
         <p:spPr>
           <a:xfrm flipV="1">
-            <a:off x="7416741" y="3062640"/>
-            <a:ext cx="1371418" cy="2464894"/>
+            <a:off x="7404885" y="2834040"/>
+            <a:ext cx="1383274" cy="2319599"/>
           </a:xfrm>
           <a:prstGeom prst="straightConnector1">
             <a:avLst/>
@@ -4763,7 +4751,7 @@
         </p:nvSpPr>
         <p:spPr>
           <a:xfrm>
-            <a:off x="9870792" y="2320309"/>
+            <a:off x="9870792" y="2091709"/>
             <a:ext cx="790601" cy="338554"/>
           </a:xfrm>
           <a:prstGeom prst="rect">
@@ -4828,7 +4816,7 @@
         </p:blipFill>
         <p:spPr bwMode="auto">
           <a:xfrm>
-            <a:off x="334703" y="5418127"/>
+            <a:off x="334703" y="4865422"/>
             <a:ext cx="621733" cy="621733"/>
           </a:xfrm>
           <a:prstGeom prst="rect">
@@ -4854,7 +4842,7 @@
         </p:nvCxnSpPr>
         <p:spPr>
           <a:xfrm flipH="1" flipV="1">
-            <a:off x="960362" y="5617502"/>
+            <a:off x="960362" y="5064797"/>
             <a:ext cx="1098665" cy="1598"/>
           </a:xfrm>
           <a:prstGeom prst="straightConnector1">
@@ -4887,7 +4875,7 @@
         </p:nvCxnSpPr>
         <p:spPr>
           <a:xfrm>
-            <a:off x="977092" y="5849247"/>
+            <a:off x="977092" y="5296542"/>
             <a:ext cx="1093065" cy="0"/>
           </a:xfrm>
           <a:prstGeom prst="straightConnector1">
@@ -4920,7 +4908,7 @@
         </p:nvSpPr>
         <p:spPr>
           <a:xfrm>
-            <a:off x="305572" y="5910118"/>
+            <a:off x="305572" y="5357413"/>
             <a:ext cx="679994" cy="338554"/>
           </a:xfrm>
           <a:prstGeom prst="rect">
@@ -4970,7 +4958,7 @@
         </p:nvSpPr>
         <p:spPr>
           <a:xfrm>
-            <a:off x="1209772" y="5626451"/>
+            <a:off x="1209772" y="5073746"/>
             <a:ext cx="599844" cy="215444"/>
           </a:xfrm>
           <a:prstGeom prst="rect">
@@ -5008,7 +4996,7 @@
         </p:nvSpPr>
         <p:spPr>
           <a:xfrm>
-            <a:off x="795432" y="2653465"/>
+            <a:off x="795432" y="2424865"/>
             <a:ext cx="490840" cy="215444"/>
           </a:xfrm>
           <a:prstGeom prst="rect">
@@ -5046,7 +5034,7 @@
         </p:nvSpPr>
         <p:spPr>
           <a:xfrm>
-            <a:off x="439157" y="1485278"/>
+            <a:off x="439157" y="1256678"/>
             <a:ext cx="498855" cy="215444"/>
           </a:xfrm>
           <a:prstGeom prst="rect">
@@ -5084,7 +5072,7 @@
         </p:nvSpPr>
         <p:spPr>
           <a:xfrm>
-            <a:off x="10389600" y="803877"/>
+            <a:off x="10389600" y="575277"/>
             <a:ext cx="934871" cy="215444"/>
           </a:xfrm>
           <a:prstGeom prst="rect">
@@ -5122,7 +5110,7 @@
         </p:nvCxnSpPr>
         <p:spPr>
           <a:xfrm>
-            <a:off x="9479614" y="2616773"/>
+            <a:off x="9479614" y="2388173"/>
             <a:ext cx="1460208" cy="8177"/>
           </a:xfrm>
           <a:prstGeom prst="straightConnector1">
@@ -5155,7 +5143,7 @@
         </p:nvCxnSpPr>
         <p:spPr>
           <a:xfrm flipH="1" flipV="1">
-            <a:off x="9479614" y="2492851"/>
+            <a:off x="9479614" y="2264251"/>
             <a:ext cx="1452856" cy="14871"/>
           </a:xfrm>
           <a:prstGeom prst="straightConnector1">
@@ -5188,7 +5176,7 @@
         </p:nvSpPr>
         <p:spPr>
           <a:xfrm>
-            <a:off x="8051166" y="1579586"/>
+            <a:off x="8051166" y="1350986"/>
             <a:ext cx="442749" cy="338554"/>
           </a:xfrm>
           <a:prstGeom prst="rect">
@@ -5238,7 +5226,7 @@
         </p:nvCxnSpPr>
         <p:spPr>
           <a:xfrm flipV="1">
-            <a:off x="9460802" y="1373698"/>
+            <a:off x="9460802" y="1145098"/>
             <a:ext cx="1251017" cy="975644"/>
           </a:xfrm>
           <a:prstGeom prst="straightConnector1">
@@ -5271,7 +5259,7 @@
         </p:nvCxnSpPr>
         <p:spPr>
           <a:xfrm flipH="1">
-            <a:off x="9383558" y="1334404"/>
+            <a:off x="9383558" y="1105804"/>
             <a:ext cx="1259042" cy="968713"/>
           </a:xfrm>
           <a:prstGeom prst="straightConnector1">
@@ -5304,7 +5292,7 @@
         </p:nvSpPr>
         <p:spPr>
           <a:xfrm>
-            <a:off x="10732128" y="2707952"/>
+            <a:off x="10732128" y="2479352"/>
             <a:ext cx="981359" cy="215444"/>
           </a:xfrm>
           <a:prstGeom prst="rect">
@@ -5342,7 +5330,7 @@
         </p:nvSpPr>
         <p:spPr>
           <a:xfrm>
-            <a:off x="9585922" y="1472867"/>
+            <a:off x="9585922" y="1244267"/>
             <a:ext cx="526106" cy="338554"/>
           </a:xfrm>
           <a:prstGeom prst="rect">
@@ -5400,7 +5388,7 @@
         </p:blipFill>
         <p:spPr>
           <a:xfrm>
-            <a:off x="10438828" y="3630368"/>
+            <a:off x="10438828" y="3401768"/>
             <a:ext cx="337178" cy="370074"/>
           </a:xfrm>
           <a:prstGeom prst="rect">
@@ -5424,7 +5412,7 @@
         </p:blipFill>
         <p:spPr>
           <a:xfrm>
-            <a:off x="9687315" y="4385078"/>
+            <a:off x="9687315" y="4156478"/>
             <a:ext cx="361105" cy="361105"/>
           </a:xfrm>
           <a:prstGeom prst="rect">
@@ -5454,7 +5442,7 @@
         </p:blipFill>
         <p:spPr>
           <a:xfrm>
-            <a:off x="10711970" y="4902059"/>
+            <a:off x="10711970" y="4673459"/>
             <a:ext cx="826934" cy="826934"/>
           </a:xfrm>
           <a:prstGeom prst="rect">
@@ -5472,7 +5460,7 @@
         </p:nvCxnSpPr>
         <p:spPr>
           <a:xfrm>
-            <a:off x="9479614" y="3044212"/>
+            <a:off x="9479614" y="2815612"/>
             <a:ext cx="959214" cy="771193"/>
           </a:xfrm>
           <a:prstGeom prst="straightConnector1">
@@ -5507,7 +5495,7 @@
         </p:nvCxnSpPr>
         <p:spPr>
           <a:xfrm>
-            <a:off x="9410700" y="3087004"/>
+            <a:off x="9410700" y="2858404"/>
             <a:ext cx="457168" cy="1298074"/>
           </a:xfrm>
           <a:prstGeom prst="straightConnector1">
@@ -5540,7 +5528,7 @@
         </p:nvCxnSpPr>
         <p:spPr>
           <a:xfrm>
-            <a:off x="9443999" y="3062640"/>
+            <a:off x="9443999" y="2834040"/>
             <a:ext cx="1387543" cy="1943298"/>
           </a:xfrm>
           <a:prstGeom prst="straightConnector1">
@@ -5575,7 +5563,7 @@
         </p:nvCxnSpPr>
         <p:spPr>
           <a:xfrm>
-            <a:off x="10607417" y="4000442"/>
+            <a:off x="10607417" y="3771842"/>
             <a:ext cx="318796" cy="916215"/>
           </a:xfrm>
           <a:prstGeom prst="straightConnector1">
@@ -5610,7 +5598,7 @@
         </p:nvCxnSpPr>
         <p:spPr>
           <a:xfrm>
-            <a:off x="10048420" y="4565631"/>
+            <a:off x="10048420" y="4337031"/>
             <a:ext cx="663399" cy="489973"/>
           </a:xfrm>
           <a:prstGeom prst="straightConnector1">
@@ -5643,7 +5631,7 @@
         </p:nvSpPr>
         <p:spPr>
           <a:xfrm>
-            <a:off x="1541578" y="4002408"/>
+            <a:off x="1541578" y="3773808"/>
             <a:ext cx="728084" cy="261610"/>
           </a:xfrm>
           <a:prstGeom prst="rect">
@@ -5696,7 +5684,7 @@
         </p:blipFill>
         <p:spPr bwMode="auto">
           <a:xfrm>
-            <a:off x="3524109" y="1247773"/>
+            <a:off x="3524109" y="1019173"/>
             <a:ext cx="154736" cy="154736"/>
           </a:xfrm>
           <a:prstGeom prst="rect">
@@ -5725,7 +5713,7 @@
         </p:nvCxnSpPr>
         <p:spPr>
           <a:xfrm flipH="1">
-            <a:off x="3597704" y="1402509"/>
+            <a:off x="3597704" y="1173909"/>
             <a:ext cx="3773" cy="1057669"/>
           </a:xfrm>
           <a:prstGeom prst="straightConnector1">
@@ -5759,7 +5747,7 @@
         </p:nvSpPr>
         <p:spPr>
           <a:xfrm>
-            <a:off x="2911922" y="912612"/>
+            <a:off x="2911922" y="684012"/>
             <a:ext cx="1388522" cy="215444"/>
           </a:xfrm>
           <a:prstGeom prst="rect">
@@ -5797,7 +5785,7 @@
         </p:nvSpPr>
         <p:spPr>
           <a:xfrm>
-            <a:off x="3008904" y="1812758"/>
+            <a:off x="3008904" y="1584158"/>
             <a:ext cx="1194558" cy="215444"/>
           </a:xfrm>
           <a:prstGeom prst="rect">
@@ -5850,7 +5838,7 @@
         </p:blipFill>
         <p:spPr bwMode="auto">
           <a:xfrm>
-            <a:off x="3454096" y="1175503"/>
+            <a:off x="3454096" y="946903"/>
             <a:ext cx="144094" cy="144094"/>
           </a:xfrm>
           <a:prstGeom prst="rect">
@@ -5891,7 +5879,7 @@
         </p:blipFill>
         <p:spPr bwMode="auto">
           <a:xfrm>
-            <a:off x="3609359" y="1175503"/>
+            <a:off x="3609359" y="946903"/>
             <a:ext cx="144094" cy="144094"/>
           </a:xfrm>
           <a:prstGeom prst="rect">
@@ -5932,7 +5920,7 @@
         </p:blipFill>
         <p:spPr bwMode="auto">
           <a:xfrm>
-            <a:off x="3531727" y="1103766"/>
+            <a:off x="3531727" y="875166"/>
             <a:ext cx="144094" cy="144094"/>
           </a:xfrm>
           <a:prstGeom prst="rect">
@@ -5973,7 +5961,7 @@
         </p:blipFill>
         <p:spPr bwMode="auto">
           <a:xfrm>
-            <a:off x="3688450" y="1103406"/>
+            <a:off x="3688450" y="874806"/>
             <a:ext cx="144094" cy="144094"/>
           </a:xfrm>
           <a:prstGeom prst="rect">
@@ -6014,7 +6002,7 @@
         </p:blipFill>
         <p:spPr bwMode="auto">
           <a:xfrm>
-            <a:off x="3381026" y="1101060"/>
+            <a:off x="3381026" y="872460"/>
             <a:ext cx="144094" cy="144094"/>
           </a:xfrm>
           <a:prstGeom prst="rect">
@@ -6040,7 +6028,7 @@
         </p:nvSpPr>
         <p:spPr>
           <a:xfrm>
-            <a:off x="10803859" y="5830072"/>
+            <a:off x="10803859" y="5601472"/>
             <a:ext cx="643125" cy="215444"/>
           </a:xfrm>
           <a:prstGeom prst="rect">
@@ -6081,7 +6069,7 @@
         </p:nvCxnSpPr>
         <p:spPr>
           <a:xfrm>
-            <a:off x="3832544" y="1175453"/>
+            <a:off x="3832544" y="946853"/>
             <a:ext cx="3151878" cy="9233"/>
           </a:xfrm>
           <a:prstGeom prst="straightConnector1">
@@ -6115,7 +6103,7 @@
         </p:nvSpPr>
         <p:spPr>
           <a:xfrm>
-            <a:off x="4678418" y="1149470"/>
+            <a:off x="4678418" y="920870"/>
             <a:ext cx="962123" cy="215444"/>
           </a:xfrm>
           <a:prstGeom prst="rect">
@@ -6168,7 +6156,7 @@
         </p:blipFill>
         <p:spPr>
           <a:xfrm>
-            <a:off x="10668024" y="1020334"/>
+            <a:off x="10668024" y="791734"/>
             <a:ext cx="378025" cy="378025"/>
           </a:xfrm>
           <a:prstGeom prst="rect">
@@ -6198,7 +6186,7 @@
         </p:blipFill>
         <p:spPr>
           <a:xfrm>
-            <a:off x="11027509" y="2354863"/>
+            <a:off x="11027509" y="2126263"/>
             <a:ext cx="378025" cy="378025"/>
           </a:xfrm>
           <a:prstGeom prst="rect">
@@ -6216,7 +6204,7 @@
         </p:nvCxnSpPr>
         <p:spPr>
           <a:xfrm>
-            <a:off x="2512181" y="1171952"/>
+            <a:off x="2512181" y="943352"/>
             <a:ext cx="828008" cy="0"/>
           </a:xfrm>
           <a:prstGeom prst="straightConnector1">
@@ -6250,7 +6238,7 @@
         </p:nvSpPr>
         <p:spPr>
           <a:xfrm>
-            <a:off x="614968" y="3111413"/>
+            <a:off x="614968" y="2882813"/>
             <a:ext cx="691215" cy="338554"/>
           </a:xfrm>
           <a:prstGeom prst="rect">
@@ -6318,15 +6306,7 @@
                   <a:schemeClr val="bg1"/>
                 </a:solidFill>
               </a:rPr>
-              <a:t>N.I.N.A. </a:t>
-            </a:r>
-            <a:r>
-              <a:rPr lang="de-DE" sz="2400" dirty="0" smtClean="0">
-                <a:solidFill>
-                  <a:schemeClr val="bg1"/>
-                </a:solidFill>
-              </a:rPr>
-              <a:t>Ecosystem</a:t>
+              <a:t>N.I.N.A. Ecosystem</a:t>
             </a:r>
             <a:endParaRPr lang="en-GB" sz="2400" dirty="0">
               <a:solidFill>
@@ -6336,6 +6316,400 @@
           </a:p>
         </p:txBody>
       </p:sp>
+      <p:pic>
+        <p:nvPicPr>
+          <p:cNvPr id="96" name="Picture 12" descr="File:Git icon.svg - Wikimedia Commons"/>
+          <p:cNvPicPr>
+            <a:picLocks noChangeAspect="1" noChangeArrowheads="1"/>
+          </p:cNvPicPr>
+          <p:nvPr/>
+        </p:nvPicPr>
+        <p:blipFill>
+          <a:blip r:embed="rId5" cstate="print">
+            <a:extLst>
+              <a:ext uri="{28A0092B-C50C-407E-A947-70E740481C1C}">
+                <a14:useLocalDpi xmlns:a14="http://schemas.microsoft.com/office/drawing/2010/main" val="0"/>
+              </a:ext>
+            </a:extLst>
+          </a:blip>
+          <a:srcRect/>
+          <a:stretch>
+            <a:fillRect/>
+          </a:stretch>
+        </p:blipFill>
+        <p:spPr bwMode="auto">
+          <a:xfrm>
+            <a:off x="2103317" y="6170689"/>
+            <a:ext cx="144094" cy="144094"/>
+          </a:xfrm>
+          <a:prstGeom prst="rect">
+            <a:avLst/>
+          </a:prstGeom>
+          <a:noFill/>
+          <a:extLst>
+            <a:ext uri="{909E8E84-426E-40DD-AFC4-6F175D3DCCD1}">
+              <a14:hiddenFill xmlns:a14="http://schemas.microsoft.com/office/drawing/2010/main">
+                <a:solidFill>
+                  <a:srgbClr val="FFFFFF"/>
+                </a:solidFill>
+              </a14:hiddenFill>
+            </a:ext>
+          </a:extLst>
+        </p:spPr>
+      </p:pic>
+      <p:pic>
+        <p:nvPicPr>
+          <p:cNvPr id="97" name="Picture 12" descr="File:Git icon.svg - Wikimedia Commons"/>
+          <p:cNvPicPr>
+            <a:picLocks noChangeAspect="1" noChangeArrowheads="1"/>
+          </p:cNvPicPr>
+          <p:nvPr/>
+        </p:nvPicPr>
+        <p:blipFill>
+          <a:blip r:embed="rId5" cstate="print">
+            <a:extLst>
+              <a:ext uri="{28A0092B-C50C-407E-A947-70E740481C1C}">
+                <a14:useLocalDpi xmlns:a14="http://schemas.microsoft.com/office/drawing/2010/main" val="0"/>
+              </a:ext>
+            </a:extLst>
+          </a:blip>
+          <a:srcRect/>
+          <a:stretch>
+            <a:fillRect/>
+          </a:stretch>
+        </p:blipFill>
+        <p:spPr bwMode="auto">
+          <a:xfrm>
+            <a:off x="2253031" y="6173345"/>
+            <a:ext cx="144094" cy="144094"/>
+          </a:xfrm>
+          <a:prstGeom prst="rect">
+            <a:avLst/>
+          </a:prstGeom>
+          <a:noFill/>
+          <a:extLst>
+            <a:ext uri="{909E8E84-426E-40DD-AFC4-6F175D3DCCD1}">
+              <a14:hiddenFill xmlns:a14="http://schemas.microsoft.com/office/drawing/2010/main">
+                <a:solidFill>
+                  <a:srgbClr val="FFFFFF"/>
+                </a:solidFill>
+              </a14:hiddenFill>
+            </a:ext>
+          </a:extLst>
+        </p:spPr>
+      </p:pic>
+      <p:pic>
+        <p:nvPicPr>
+          <p:cNvPr id="98" name="Picture 12" descr="File:Git icon.svg - Wikimedia Commons"/>
+          <p:cNvPicPr>
+            <a:picLocks noChangeAspect="1" noChangeArrowheads="1"/>
+          </p:cNvPicPr>
+          <p:nvPr/>
+        </p:nvPicPr>
+        <p:blipFill>
+          <a:blip r:embed="rId5" cstate="print">
+            <a:extLst>
+              <a:ext uri="{28A0092B-C50C-407E-A947-70E740481C1C}">
+                <a14:useLocalDpi xmlns:a14="http://schemas.microsoft.com/office/drawing/2010/main" val="0"/>
+              </a:ext>
+            </a:extLst>
+          </a:blip>
+          <a:srcRect/>
+          <a:stretch>
+            <a:fillRect/>
+          </a:stretch>
+        </p:blipFill>
+        <p:spPr bwMode="auto">
+          <a:xfrm>
+            <a:off x="2175977" y="6245442"/>
+            <a:ext cx="144094" cy="144094"/>
+          </a:xfrm>
+          <a:prstGeom prst="rect">
+            <a:avLst/>
+          </a:prstGeom>
+          <a:noFill/>
+          <a:extLst>
+            <a:ext uri="{909E8E84-426E-40DD-AFC4-6F175D3DCCD1}">
+              <a14:hiddenFill xmlns:a14="http://schemas.microsoft.com/office/drawing/2010/main">
+                <a:solidFill>
+                  <a:srgbClr val="FFFFFF"/>
+                </a:solidFill>
+              </a14:hiddenFill>
+            </a:ext>
+          </a:extLst>
+        </p:spPr>
+      </p:pic>
+      <p:pic>
+        <p:nvPicPr>
+          <p:cNvPr id="99" name="Picture 12" descr="File:Git icon.svg - Wikimedia Commons"/>
+          <p:cNvPicPr>
+            <a:picLocks noChangeAspect="1" noChangeArrowheads="1"/>
+          </p:cNvPicPr>
+          <p:nvPr/>
+        </p:nvPicPr>
+        <p:blipFill>
+          <a:blip r:embed="rId5" cstate="print">
+            <a:extLst>
+              <a:ext uri="{28A0092B-C50C-407E-A947-70E740481C1C}">
+                <a14:useLocalDpi xmlns:a14="http://schemas.microsoft.com/office/drawing/2010/main" val="0"/>
+              </a:ext>
+            </a:extLst>
+          </a:blip>
+          <a:srcRect/>
+          <a:stretch>
+            <a:fillRect/>
+          </a:stretch>
+        </p:blipFill>
+        <p:spPr bwMode="auto">
+          <a:xfrm>
+            <a:off x="2332700" y="6245082"/>
+            <a:ext cx="144094" cy="144094"/>
+          </a:xfrm>
+          <a:prstGeom prst="rect">
+            <a:avLst/>
+          </a:prstGeom>
+          <a:noFill/>
+          <a:extLst>
+            <a:ext uri="{909E8E84-426E-40DD-AFC4-6F175D3DCCD1}">
+              <a14:hiddenFill xmlns:a14="http://schemas.microsoft.com/office/drawing/2010/main">
+                <a:solidFill>
+                  <a:srgbClr val="FFFFFF"/>
+                </a:solidFill>
+              </a14:hiddenFill>
+            </a:ext>
+          </a:extLst>
+        </p:spPr>
+      </p:pic>
+      <p:pic>
+        <p:nvPicPr>
+          <p:cNvPr id="100" name="Picture 12" descr="File:Git icon.svg - Wikimedia Commons"/>
+          <p:cNvPicPr>
+            <a:picLocks noChangeAspect="1" noChangeArrowheads="1"/>
+          </p:cNvPicPr>
+          <p:nvPr/>
+        </p:nvPicPr>
+        <p:blipFill>
+          <a:blip r:embed="rId5" cstate="print">
+            <a:extLst>
+              <a:ext uri="{28A0092B-C50C-407E-A947-70E740481C1C}">
+                <a14:useLocalDpi xmlns:a14="http://schemas.microsoft.com/office/drawing/2010/main" val="0"/>
+              </a:ext>
+            </a:extLst>
+          </a:blip>
+          <a:srcRect/>
+          <a:stretch>
+            <a:fillRect/>
+          </a:stretch>
+        </p:blipFill>
+        <p:spPr bwMode="auto">
+          <a:xfrm>
+            <a:off x="2025276" y="6242736"/>
+            <a:ext cx="144094" cy="144094"/>
+          </a:xfrm>
+          <a:prstGeom prst="rect">
+            <a:avLst/>
+          </a:prstGeom>
+          <a:noFill/>
+          <a:extLst>
+            <a:ext uri="{909E8E84-426E-40DD-AFC4-6F175D3DCCD1}">
+              <a14:hiddenFill xmlns:a14="http://schemas.microsoft.com/office/drawing/2010/main">
+                <a:solidFill>
+                  <a:srgbClr val="FFFFFF"/>
+                </a:solidFill>
+              </a14:hiddenFill>
+            </a:ext>
+          </a:extLst>
+        </p:spPr>
+      </p:pic>
+      <p:sp>
+        <p:nvSpPr>
+          <p:cNvPr id="101" name="Textfeld 100"/>
+          <p:cNvSpPr txBox="1"/>
+          <p:nvPr/>
+        </p:nvSpPr>
+        <p:spPr>
+          <a:xfrm>
+            <a:off x="1876120" y="6393056"/>
+            <a:ext cx="713657" cy="215444"/>
+          </a:xfrm>
+          <a:prstGeom prst="rect">
+            <a:avLst/>
+          </a:prstGeom>
+          <a:noFill/>
+        </p:spPr>
+        <p:txBody>
+          <a:bodyPr wrap="none" rtlCol="0">
+            <a:spAutoFit/>
+          </a:bodyPr>
+          <a:lstStyle/>
+          <a:p>
+            <a:r>
+              <a:rPr lang="de-DE" sz="800" dirty="0" smtClean="0">
+                <a:solidFill>
+                  <a:schemeClr val="bg1"/>
+                </a:solidFill>
+              </a:rPr>
+              <a:t>Contributors</a:t>
+            </a:r>
+            <a:endParaRPr lang="en-GB" sz="1000" dirty="0">
+              <a:solidFill>
+                <a:schemeClr val="bg1"/>
+              </a:solidFill>
+            </a:endParaRPr>
+          </a:p>
+        </p:txBody>
+      </p:sp>
+      <p:cxnSp>
+        <p:nvCxnSpPr>
+          <p:cNvPr id="19" name="Gerade Verbindung mit Pfeil 18"/>
+          <p:cNvCxnSpPr>
+            <a:stCxn id="107" idx="0"/>
+            <a:endCxn id="10" idx="2"/>
+          </p:cNvCxnSpPr>
+          <p:nvPr/>
+        </p:nvCxnSpPr>
+        <p:spPr>
+          <a:xfrm flipV="1">
+            <a:off x="2251259" y="5623927"/>
+            <a:ext cx="0" cy="473218"/>
+          </a:xfrm>
+          <a:prstGeom prst="straightConnector1">
+            <a:avLst/>
+          </a:prstGeom>
+          <a:ln>
+            <a:prstDash val="dash"/>
+            <a:tailEnd type="triangle"/>
+          </a:ln>
+        </p:spPr>
+        <p:style>
+          <a:lnRef idx="1">
+            <a:schemeClr val="accent1"/>
+          </a:lnRef>
+          <a:fillRef idx="0">
+            <a:schemeClr val="accent1"/>
+          </a:fillRef>
+          <a:effectRef idx="0">
+            <a:schemeClr val="accent1"/>
+          </a:effectRef>
+          <a:fontRef idx="minor">
+            <a:schemeClr val="tx1"/>
+          </a:fontRef>
+        </p:style>
+      </p:cxnSp>
+      <p:sp>
+        <p:nvSpPr>
+          <p:cNvPr id="105" name="Textfeld 104"/>
+          <p:cNvSpPr txBox="1"/>
+          <p:nvPr/>
+        </p:nvSpPr>
+        <p:spPr>
+          <a:xfrm>
+            <a:off x="2187044" y="5672855"/>
+            <a:ext cx="724878" cy="461665"/>
+          </a:xfrm>
+          <a:prstGeom prst="rect">
+            <a:avLst/>
+          </a:prstGeom>
+          <a:noFill/>
+        </p:spPr>
+        <p:txBody>
+          <a:bodyPr wrap="none" rtlCol="0">
+            <a:spAutoFit/>
+          </a:bodyPr>
+          <a:lstStyle/>
+          <a:p>
+            <a:pPr algn="ctr"/>
+            <a:r>
+              <a:rPr lang="de-DE" sz="800" dirty="0" smtClean="0">
+                <a:solidFill>
+                  <a:schemeClr val="bg1"/>
+                </a:solidFill>
+              </a:rPr>
+              <a:t>Pull Request</a:t>
+            </a:r>
+          </a:p>
+          <a:p>
+            <a:pPr algn="ctr"/>
+            <a:r>
+              <a:rPr lang="de-DE" sz="800" dirty="0">
+                <a:solidFill>
+                  <a:schemeClr val="bg1"/>
+                </a:solidFill>
+              </a:rPr>
+              <a:t>&amp;</a:t>
+            </a:r>
+            <a:r>
+              <a:rPr lang="de-DE" sz="800" dirty="0" smtClean="0">
+                <a:solidFill>
+                  <a:schemeClr val="bg1"/>
+                </a:solidFill>
+              </a:rPr>
+              <a:t/>
+            </a:r>
+            <a:br>
+              <a:rPr lang="de-DE" sz="800" dirty="0" smtClean="0">
+                <a:solidFill>
+                  <a:schemeClr val="bg1"/>
+                </a:solidFill>
+              </a:rPr>
+            </a:br>
+            <a:r>
+              <a:rPr lang="de-DE" sz="800" dirty="0" smtClean="0">
+                <a:solidFill>
+                  <a:schemeClr val="bg1"/>
+                </a:solidFill>
+              </a:rPr>
+              <a:t>Code Review</a:t>
+            </a:r>
+            <a:endParaRPr lang="en-GB" sz="1000" dirty="0">
+              <a:solidFill>
+                <a:schemeClr val="bg1"/>
+              </a:solidFill>
+            </a:endParaRPr>
+          </a:p>
+        </p:txBody>
+      </p:sp>
+      <p:pic>
+        <p:nvPicPr>
+          <p:cNvPr id="107" name="Picture 12" descr="File:Git icon.svg - Wikimedia Commons"/>
+          <p:cNvPicPr>
+            <a:picLocks noChangeAspect="1" noChangeArrowheads="1"/>
+          </p:cNvPicPr>
+          <p:nvPr/>
+        </p:nvPicPr>
+        <p:blipFill>
+          <a:blip r:embed="rId5" cstate="print">
+            <a:extLst>
+              <a:ext uri="{28A0092B-C50C-407E-A947-70E740481C1C}">
+                <a14:useLocalDpi xmlns:a14="http://schemas.microsoft.com/office/drawing/2010/main" val="0"/>
+              </a:ext>
+            </a:extLst>
+          </a:blip>
+          <a:srcRect/>
+          <a:stretch>
+            <a:fillRect/>
+          </a:stretch>
+        </p:blipFill>
+        <p:spPr bwMode="auto">
+          <a:xfrm>
+            <a:off x="2179212" y="6097145"/>
+            <a:ext cx="144094" cy="144094"/>
+          </a:xfrm>
+          <a:prstGeom prst="rect">
+            <a:avLst/>
+          </a:prstGeom>
+          <a:noFill/>
+          <a:extLst>
+            <a:ext uri="{909E8E84-426E-40DD-AFC4-6F175D3DCCD1}">
+              <a14:hiddenFill xmlns:a14="http://schemas.microsoft.com/office/drawing/2010/main">
+                <a:solidFill>
+                  <a:srgbClr val="FFFFFF"/>
+                </a:solidFill>
+              </a14:hiddenFill>
+            </a:ext>
+          </a:extLst>
+        </p:spPr>
+      </p:pic>
     </p:spTree>
     <p:extLst>
       <p:ext uri="{BB962C8B-B14F-4D97-AF65-F5344CB8AC3E}">

--- a/resources/Ecosystem.pptx
+++ b/resources/Ecosystem.pptx
@@ -154,7 +154,7 @@
           </a:lstStyle>
           <a:p>
             <a:r>
-              <a:rPr lang="de-DE" smtClean="0"/>
+              <a:rPr lang="de-DE"/>
               <a:t>Titelmasterformat durch Klicken bearbeiten</a:t>
             </a:r>
             <a:endParaRPr lang="en-GB"/>
@@ -219,7 +219,7 @@
           </a:lstStyle>
           <a:p>
             <a:r>
-              <a:rPr lang="de-DE" smtClean="0"/>
+              <a:rPr lang="de-DE"/>
               <a:t>Formatvorlage des Untertitelmasters durch Klicken bearbeiten</a:t>
             </a:r>
             <a:endParaRPr lang="en-GB"/>
@@ -243,7 +243,7 @@
           <a:p>
             <a:fld id="{3FB75DC4-049D-4A9B-B286-BF003F86F273}" type="datetimeFigureOut">
               <a:rPr lang="en-GB" smtClean="0"/>
-              <a:t>30/10/2021</a:t>
+              <a:t>23/06/2025</a:t>
             </a:fld>
             <a:endParaRPr lang="en-GB" dirty="0"/>
           </a:p>
@@ -285,7 +285,7 @@
           <a:p>
             <a:fld id="{28392D24-8B86-4B92-BF71-2898FDE196EB}" type="slidenum">
               <a:rPr lang="en-GB" smtClean="0"/>
-              <a:t>‹Nr.›</a:t>
+              <a:t>‹#›</a:t>
             </a:fld>
             <a:endParaRPr lang="en-GB" dirty="0"/>
           </a:p>
@@ -337,7 +337,7 @@
           <a:lstStyle/>
           <a:p>
             <a:r>
-              <a:rPr lang="de-DE" smtClean="0"/>
+              <a:rPr lang="de-DE"/>
               <a:t>Titelmasterformat durch Klicken bearbeiten</a:t>
             </a:r>
             <a:endParaRPr lang="en-GB"/>
@@ -361,35 +361,35 @@
           <a:p>
             <a:pPr lvl="0"/>
             <a:r>
-              <a:rPr lang="de-DE" smtClean="0"/>
+              <a:rPr lang="de-DE"/>
               <a:t>Textmasterformat bearbeiten</a:t>
             </a:r>
           </a:p>
           <a:p>
             <a:pPr lvl="1"/>
             <a:r>
-              <a:rPr lang="de-DE" smtClean="0"/>
+              <a:rPr lang="de-DE"/>
               <a:t>Zweite Ebene</a:t>
             </a:r>
           </a:p>
           <a:p>
             <a:pPr lvl="2"/>
             <a:r>
-              <a:rPr lang="de-DE" smtClean="0"/>
+              <a:rPr lang="de-DE"/>
               <a:t>Dritte Ebene</a:t>
             </a:r>
           </a:p>
           <a:p>
             <a:pPr lvl="3"/>
             <a:r>
-              <a:rPr lang="de-DE" smtClean="0"/>
+              <a:rPr lang="de-DE"/>
               <a:t>Vierte Ebene</a:t>
             </a:r>
           </a:p>
           <a:p>
             <a:pPr lvl="4"/>
             <a:r>
-              <a:rPr lang="de-DE" smtClean="0"/>
+              <a:rPr lang="de-DE"/>
               <a:t>Fünfte Ebene</a:t>
             </a:r>
             <a:endParaRPr lang="en-GB"/>
@@ -413,7 +413,7 @@
           <a:p>
             <a:fld id="{3FB75DC4-049D-4A9B-B286-BF003F86F273}" type="datetimeFigureOut">
               <a:rPr lang="en-GB" smtClean="0"/>
-              <a:t>30/10/2021</a:t>
+              <a:t>23/06/2025</a:t>
             </a:fld>
             <a:endParaRPr lang="en-GB" dirty="0"/>
           </a:p>
@@ -455,7 +455,7 @@
           <a:p>
             <a:fld id="{28392D24-8B86-4B92-BF71-2898FDE196EB}" type="slidenum">
               <a:rPr lang="en-GB" smtClean="0"/>
-              <a:t>‹Nr.›</a:t>
+              <a:t>‹#›</a:t>
             </a:fld>
             <a:endParaRPr lang="en-GB" dirty="0"/>
           </a:p>
@@ -512,7 +512,7 @@
           <a:lstStyle/>
           <a:p>
             <a:r>
-              <a:rPr lang="de-DE" smtClean="0"/>
+              <a:rPr lang="de-DE"/>
               <a:t>Titelmasterformat durch Klicken bearbeiten</a:t>
             </a:r>
             <a:endParaRPr lang="en-GB"/>
@@ -541,35 +541,35 @@
           <a:p>
             <a:pPr lvl="0"/>
             <a:r>
-              <a:rPr lang="de-DE" smtClean="0"/>
+              <a:rPr lang="de-DE"/>
               <a:t>Textmasterformat bearbeiten</a:t>
             </a:r>
           </a:p>
           <a:p>
             <a:pPr lvl="1"/>
             <a:r>
-              <a:rPr lang="de-DE" smtClean="0"/>
+              <a:rPr lang="de-DE"/>
               <a:t>Zweite Ebene</a:t>
             </a:r>
           </a:p>
           <a:p>
             <a:pPr lvl="2"/>
             <a:r>
-              <a:rPr lang="de-DE" smtClean="0"/>
+              <a:rPr lang="de-DE"/>
               <a:t>Dritte Ebene</a:t>
             </a:r>
           </a:p>
           <a:p>
             <a:pPr lvl="3"/>
             <a:r>
-              <a:rPr lang="de-DE" smtClean="0"/>
+              <a:rPr lang="de-DE"/>
               <a:t>Vierte Ebene</a:t>
             </a:r>
           </a:p>
           <a:p>
             <a:pPr lvl="4"/>
             <a:r>
-              <a:rPr lang="de-DE" smtClean="0"/>
+              <a:rPr lang="de-DE"/>
               <a:t>Fünfte Ebene</a:t>
             </a:r>
             <a:endParaRPr lang="en-GB"/>
@@ -593,7 +593,7 @@
           <a:p>
             <a:fld id="{3FB75DC4-049D-4A9B-B286-BF003F86F273}" type="datetimeFigureOut">
               <a:rPr lang="en-GB" smtClean="0"/>
-              <a:t>30/10/2021</a:t>
+              <a:t>23/06/2025</a:t>
             </a:fld>
             <a:endParaRPr lang="en-GB" dirty="0"/>
           </a:p>
@@ -635,7 +635,7 @@
           <a:p>
             <a:fld id="{28392D24-8B86-4B92-BF71-2898FDE196EB}" type="slidenum">
               <a:rPr lang="en-GB" smtClean="0"/>
-              <a:t>‹Nr.›</a:t>
+              <a:t>‹#›</a:t>
             </a:fld>
             <a:endParaRPr lang="en-GB" dirty="0"/>
           </a:p>
@@ -687,7 +687,7 @@
           <a:lstStyle/>
           <a:p>
             <a:r>
-              <a:rPr lang="de-DE" smtClean="0"/>
+              <a:rPr lang="de-DE"/>
               <a:t>Titelmasterformat durch Klicken bearbeiten</a:t>
             </a:r>
             <a:endParaRPr lang="en-GB"/>
@@ -711,35 +711,35 @@
           <a:p>
             <a:pPr lvl="0"/>
             <a:r>
-              <a:rPr lang="de-DE" smtClean="0"/>
+              <a:rPr lang="de-DE"/>
               <a:t>Textmasterformat bearbeiten</a:t>
             </a:r>
           </a:p>
           <a:p>
             <a:pPr lvl="1"/>
             <a:r>
-              <a:rPr lang="de-DE" smtClean="0"/>
+              <a:rPr lang="de-DE"/>
               <a:t>Zweite Ebene</a:t>
             </a:r>
           </a:p>
           <a:p>
             <a:pPr lvl="2"/>
             <a:r>
-              <a:rPr lang="de-DE" smtClean="0"/>
+              <a:rPr lang="de-DE"/>
               <a:t>Dritte Ebene</a:t>
             </a:r>
           </a:p>
           <a:p>
             <a:pPr lvl="3"/>
             <a:r>
-              <a:rPr lang="de-DE" smtClean="0"/>
+              <a:rPr lang="de-DE"/>
               <a:t>Vierte Ebene</a:t>
             </a:r>
           </a:p>
           <a:p>
             <a:pPr lvl="4"/>
             <a:r>
-              <a:rPr lang="de-DE" smtClean="0"/>
+              <a:rPr lang="de-DE"/>
               <a:t>Fünfte Ebene</a:t>
             </a:r>
             <a:endParaRPr lang="en-GB"/>
@@ -763,7 +763,7 @@
           <a:p>
             <a:fld id="{3FB75DC4-049D-4A9B-B286-BF003F86F273}" type="datetimeFigureOut">
               <a:rPr lang="en-GB" smtClean="0"/>
-              <a:t>30/10/2021</a:t>
+              <a:t>23/06/2025</a:t>
             </a:fld>
             <a:endParaRPr lang="en-GB" dirty="0"/>
           </a:p>
@@ -805,7 +805,7 @@
           <a:p>
             <a:fld id="{28392D24-8B86-4B92-BF71-2898FDE196EB}" type="slidenum">
               <a:rPr lang="en-GB" smtClean="0"/>
-              <a:t>‹Nr.›</a:t>
+              <a:t>‹#›</a:t>
             </a:fld>
             <a:endParaRPr lang="en-GB" dirty="0"/>
           </a:p>
@@ -866,7 +866,7 @@
           </a:lstStyle>
           <a:p>
             <a:r>
-              <a:rPr lang="de-DE" smtClean="0"/>
+              <a:rPr lang="de-DE"/>
               <a:t>Titelmasterformat durch Klicken bearbeiten</a:t>
             </a:r>
             <a:endParaRPr lang="en-GB"/>
@@ -986,7 +986,7 @@
           <a:p>
             <a:pPr lvl="0"/>
             <a:r>
-              <a:rPr lang="de-DE" smtClean="0"/>
+              <a:rPr lang="de-DE"/>
               <a:t>Textmasterformat bearbeiten</a:t>
             </a:r>
           </a:p>
@@ -1009,7 +1009,7 @@
           <a:p>
             <a:fld id="{3FB75DC4-049D-4A9B-B286-BF003F86F273}" type="datetimeFigureOut">
               <a:rPr lang="en-GB" smtClean="0"/>
-              <a:t>30/10/2021</a:t>
+              <a:t>23/06/2025</a:t>
             </a:fld>
             <a:endParaRPr lang="en-GB" dirty="0"/>
           </a:p>
@@ -1051,7 +1051,7 @@
           <a:p>
             <a:fld id="{28392D24-8B86-4B92-BF71-2898FDE196EB}" type="slidenum">
               <a:rPr lang="en-GB" smtClean="0"/>
-              <a:t>‹Nr.›</a:t>
+              <a:t>‹#›</a:t>
             </a:fld>
             <a:endParaRPr lang="en-GB" dirty="0"/>
           </a:p>
@@ -1103,7 +1103,7 @@
           <a:lstStyle/>
           <a:p>
             <a:r>
-              <a:rPr lang="de-DE" smtClean="0"/>
+              <a:rPr lang="de-DE"/>
               <a:t>Titelmasterformat durch Klicken bearbeiten</a:t>
             </a:r>
             <a:endParaRPr lang="en-GB"/>
@@ -1132,35 +1132,35 @@
           <a:p>
             <a:pPr lvl="0"/>
             <a:r>
-              <a:rPr lang="de-DE" smtClean="0"/>
+              <a:rPr lang="de-DE"/>
               <a:t>Textmasterformat bearbeiten</a:t>
             </a:r>
           </a:p>
           <a:p>
             <a:pPr lvl="1"/>
             <a:r>
-              <a:rPr lang="de-DE" smtClean="0"/>
+              <a:rPr lang="de-DE"/>
               <a:t>Zweite Ebene</a:t>
             </a:r>
           </a:p>
           <a:p>
             <a:pPr lvl="2"/>
             <a:r>
-              <a:rPr lang="de-DE" smtClean="0"/>
+              <a:rPr lang="de-DE"/>
               <a:t>Dritte Ebene</a:t>
             </a:r>
           </a:p>
           <a:p>
             <a:pPr lvl="3"/>
             <a:r>
-              <a:rPr lang="de-DE" smtClean="0"/>
+              <a:rPr lang="de-DE"/>
               <a:t>Vierte Ebene</a:t>
             </a:r>
           </a:p>
           <a:p>
             <a:pPr lvl="4"/>
             <a:r>
-              <a:rPr lang="de-DE" smtClean="0"/>
+              <a:rPr lang="de-DE"/>
               <a:t>Fünfte Ebene</a:t>
             </a:r>
             <a:endParaRPr lang="en-GB"/>
@@ -1189,35 +1189,35 @@
           <a:p>
             <a:pPr lvl="0"/>
             <a:r>
-              <a:rPr lang="de-DE" smtClean="0"/>
+              <a:rPr lang="de-DE"/>
               <a:t>Textmasterformat bearbeiten</a:t>
             </a:r>
           </a:p>
           <a:p>
             <a:pPr lvl="1"/>
             <a:r>
-              <a:rPr lang="de-DE" smtClean="0"/>
+              <a:rPr lang="de-DE"/>
               <a:t>Zweite Ebene</a:t>
             </a:r>
           </a:p>
           <a:p>
             <a:pPr lvl="2"/>
             <a:r>
-              <a:rPr lang="de-DE" smtClean="0"/>
+              <a:rPr lang="de-DE"/>
               <a:t>Dritte Ebene</a:t>
             </a:r>
           </a:p>
           <a:p>
             <a:pPr lvl="3"/>
             <a:r>
-              <a:rPr lang="de-DE" smtClean="0"/>
+              <a:rPr lang="de-DE"/>
               <a:t>Vierte Ebene</a:t>
             </a:r>
           </a:p>
           <a:p>
             <a:pPr lvl="4"/>
             <a:r>
-              <a:rPr lang="de-DE" smtClean="0"/>
+              <a:rPr lang="de-DE"/>
               <a:t>Fünfte Ebene</a:t>
             </a:r>
             <a:endParaRPr lang="en-GB"/>
@@ -1241,7 +1241,7 @@
           <a:p>
             <a:fld id="{3FB75DC4-049D-4A9B-B286-BF003F86F273}" type="datetimeFigureOut">
               <a:rPr lang="en-GB" smtClean="0"/>
-              <a:t>30/10/2021</a:t>
+              <a:t>23/06/2025</a:t>
             </a:fld>
             <a:endParaRPr lang="en-GB" dirty="0"/>
           </a:p>
@@ -1283,7 +1283,7 @@
           <a:p>
             <a:fld id="{28392D24-8B86-4B92-BF71-2898FDE196EB}" type="slidenum">
               <a:rPr lang="en-GB" smtClean="0"/>
-              <a:t>‹Nr.›</a:t>
+              <a:t>‹#›</a:t>
             </a:fld>
             <a:endParaRPr lang="en-GB" dirty="0"/>
           </a:p>
@@ -1340,7 +1340,7 @@
           <a:lstStyle/>
           <a:p>
             <a:r>
-              <a:rPr lang="de-DE" smtClean="0"/>
+              <a:rPr lang="de-DE"/>
               <a:t>Titelmasterformat durch Klicken bearbeiten</a:t>
             </a:r>
             <a:endParaRPr lang="en-GB"/>
@@ -1406,7 +1406,7 @@
           <a:p>
             <a:pPr lvl="0"/>
             <a:r>
-              <a:rPr lang="de-DE" smtClean="0"/>
+              <a:rPr lang="de-DE"/>
               <a:t>Textmasterformat bearbeiten</a:t>
             </a:r>
           </a:p>
@@ -1434,35 +1434,35 @@
           <a:p>
             <a:pPr lvl="0"/>
             <a:r>
-              <a:rPr lang="de-DE" smtClean="0"/>
+              <a:rPr lang="de-DE"/>
               <a:t>Textmasterformat bearbeiten</a:t>
             </a:r>
           </a:p>
           <a:p>
             <a:pPr lvl="1"/>
             <a:r>
-              <a:rPr lang="de-DE" smtClean="0"/>
+              <a:rPr lang="de-DE"/>
               <a:t>Zweite Ebene</a:t>
             </a:r>
           </a:p>
           <a:p>
             <a:pPr lvl="2"/>
             <a:r>
-              <a:rPr lang="de-DE" smtClean="0"/>
+              <a:rPr lang="de-DE"/>
               <a:t>Dritte Ebene</a:t>
             </a:r>
           </a:p>
           <a:p>
             <a:pPr lvl="3"/>
             <a:r>
-              <a:rPr lang="de-DE" smtClean="0"/>
+              <a:rPr lang="de-DE"/>
               <a:t>Vierte Ebene</a:t>
             </a:r>
           </a:p>
           <a:p>
             <a:pPr lvl="4"/>
             <a:r>
-              <a:rPr lang="de-DE" smtClean="0"/>
+              <a:rPr lang="de-DE"/>
               <a:t>Fünfte Ebene</a:t>
             </a:r>
             <a:endParaRPr lang="en-GB"/>
@@ -1528,7 +1528,7 @@
           <a:p>
             <a:pPr lvl="0"/>
             <a:r>
-              <a:rPr lang="de-DE" smtClean="0"/>
+              <a:rPr lang="de-DE"/>
               <a:t>Textmasterformat bearbeiten</a:t>
             </a:r>
           </a:p>
@@ -1556,35 +1556,35 @@
           <a:p>
             <a:pPr lvl="0"/>
             <a:r>
-              <a:rPr lang="de-DE" smtClean="0"/>
+              <a:rPr lang="de-DE"/>
               <a:t>Textmasterformat bearbeiten</a:t>
             </a:r>
           </a:p>
           <a:p>
             <a:pPr lvl="1"/>
             <a:r>
-              <a:rPr lang="de-DE" smtClean="0"/>
+              <a:rPr lang="de-DE"/>
               <a:t>Zweite Ebene</a:t>
             </a:r>
           </a:p>
           <a:p>
             <a:pPr lvl="2"/>
             <a:r>
-              <a:rPr lang="de-DE" smtClean="0"/>
+              <a:rPr lang="de-DE"/>
               <a:t>Dritte Ebene</a:t>
             </a:r>
           </a:p>
           <a:p>
             <a:pPr lvl="3"/>
             <a:r>
-              <a:rPr lang="de-DE" smtClean="0"/>
+              <a:rPr lang="de-DE"/>
               <a:t>Vierte Ebene</a:t>
             </a:r>
           </a:p>
           <a:p>
             <a:pPr lvl="4"/>
             <a:r>
-              <a:rPr lang="de-DE" smtClean="0"/>
+              <a:rPr lang="de-DE"/>
               <a:t>Fünfte Ebene</a:t>
             </a:r>
             <a:endParaRPr lang="en-GB"/>
@@ -1608,7 +1608,7 @@
           <a:p>
             <a:fld id="{3FB75DC4-049D-4A9B-B286-BF003F86F273}" type="datetimeFigureOut">
               <a:rPr lang="en-GB" smtClean="0"/>
-              <a:t>30/10/2021</a:t>
+              <a:t>23/06/2025</a:t>
             </a:fld>
             <a:endParaRPr lang="en-GB" dirty="0"/>
           </a:p>
@@ -1650,7 +1650,7 @@
           <a:p>
             <a:fld id="{28392D24-8B86-4B92-BF71-2898FDE196EB}" type="slidenum">
               <a:rPr lang="en-GB" smtClean="0"/>
-              <a:t>‹Nr.›</a:t>
+              <a:t>‹#›</a:t>
             </a:fld>
             <a:endParaRPr lang="en-GB" dirty="0"/>
           </a:p>
@@ -1702,7 +1702,7 @@
           <a:lstStyle/>
           <a:p>
             <a:r>
-              <a:rPr lang="de-DE" smtClean="0"/>
+              <a:rPr lang="de-DE"/>
               <a:t>Titelmasterformat durch Klicken bearbeiten</a:t>
             </a:r>
             <a:endParaRPr lang="en-GB"/>
@@ -1726,7 +1726,7 @@
           <a:p>
             <a:fld id="{3FB75DC4-049D-4A9B-B286-BF003F86F273}" type="datetimeFigureOut">
               <a:rPr lang="en-GB" smtClean="0"/>
-              <a:t>30/10/2021</a:t>
+              <a:t>23/06/2025</a:t>
             </a:fld>
             <a:endParaRPr lang="en-GB" dirty="0"/>
           </a:p>
@@ -1768,7 +1768,7 @@
           <a:p>
             <a:fld id="{28392D24-8B86-4B92-BF71-2898FDE196EB}" type="slidenum">
               <a:rPr lang="en-GB" smtClean="0"/>
-              <a:t>‹Nr.›</a:t>
+              <a:t>‹#›</a:t>
             </a:fld>
             <a:endParaRPr lang="en-GB" dirty="0"/>
           </a:p>
@@ -1821,7 +1821,7 @@
           <a:p>
             <a:fld id="{3FB75DC4-049D-4A9B-B286-BF003F86F273}" type="datetimeFigureOut">
               <a:rPr lang="en-GB" smtClean="0"/>
-              <a:t>30/10/2021</a:t>
+              <a:t>23/06/2025</a:t>
             </a:fld>
             <a:endParaRPr lang="en-GB" dirty="0"/>
           </a:p>
@@ -1863,7 +1863,7 @@
           <a:p>
             <a:fld id="{28392D24-8B86-4B92-BF71-2898FDE196EB}" type="slidenum">
               <a:rPr lang="en-GB" smtClean="0"/>
-              <a:t>‹Nr.›</a:t>
+              <a:t>‹#›</a:t>
             </a:fld>
             <a:endParaRPr lang="en-GB" dirty="0"/>
           </a:p>
@@ -1924,7 +1924,7 @@
           </a:lstStyle>
           <a:p>
             <a:r>
-              <a:rPr lang="de-DE" smtClean="0"/>
+              <a:rPr lang="de-DE"/>
               <a:t>Titelmasterformat durch Klicken bearbeiten</a:t>
             </a:r>
             <a:endParaRPr lang="en-GB"/>
@@ -1981,35 +1981,35 @@
           <a:p>
             <a:pPr lvl="0"/>
             <a:r>
-              <a:rPr lang="de-DE" smtClean="0"/>
+              <a:rPr lang="de-DE"/>
               <a:t>Textmasterformat bearbeiten</a:t>
             </a:r>
           </a:p>
           <a:p>
             <a:pPr lvl="1"/>
             <a:r>
-              <a:rPr lang="de-DE" smtClean="0"/>
+              <a:rPr lang="de-DE"/>
               <a:t>Zweite Ebene</a:t>
             </a:r>
           </a:p>
           <a:p>
             <a:pPr lvl="2"/>
             <a:r>
-              <a:rPr lang="de-DE" smtClean="0"/>
+              <a:rPr lang="de-DE"/>
               <a:t>Dritte Ebene</a:t>
             </a:r>
           </a:p>
           <a:p>
             <a:pPr lvl="3"/>
             <a:r>
-              <a:rPr lang="de-DE" smtClean="0"/>
+              <a:rPr lang="de-DE"/>
               <a:t>Vierte Ebene</a:t>
             </a:r>
           </a:p>
           <a:p>
             <a:pPr lvl="4"/>
             <a:r>
-              <a:rPr lang="de-DE" smtClean="0"/>
+              <a:rPr lang="de-DE"/>
               <a:t>Fünfte Ebene</a:t>
             </a:r>
             <a:endParaRPr lang="en-GB"/>
@@ -2075,7 +2075,7 @@
           <a:p>
             <a:pPr lvl="0"/>
             <a:r>
-              <a:rPr lang="de-DE" smtClean="0"/>
+              <a:rPr lang="de-DE"/>
               <a:t>Textmasterformat bearbeiten</a:t>
             </a:r>
           </a:p>
@@ -2098,7 +2098,7 @@
           <a:p>
             <a:fld id="{3FB75DC4-049D-4A9B-B286-BF003F86F273}" type="datetimeFigureOut">
               <a:rPr lang="en-GB" smtClean="0"/>
-              <a:t>30/10/2021</a:t>
+              <a:t>23/06/2025</a:t>
             </a:fld>
             <a:endParaRPr lang="en-GB" dirty="0"/>
           </a:p>
@@ -2140,7 +2140,7 @@
           <a:p>
             <a:fld id="{28392D24-8B86-4B92-BF71-2898FDE196EB}" type="slidenum">
               <a:rPr lang="en-GB" smtClean="0"/>
-              <a:t>‹Nr.›</a:t>
+              <a:t>‹#›</a:t>
             </a:fld>
             <a:endParaRPr lang="en-GB" dirty="0"/>
           </a:p>
@@ -2201,7 +2201,7 @@
           </a:lstStyle>
           <a:p>
             <a:r>
-              <a:rPr lang="de-DE" smtClean="0"/>
+              <a:rPr lang="de-DE"/>
               <a:t>Titelmasterformat durch Klicken bearbeiten</a:t>
             </a:r>
             <a:endParaRPr lang="en-GB"/>
@@ -2328,7 +2328,7 @@
           <a:p>
             <a:pPr lvl="0"/>
             <a:r>
-              <a:rPr lang="de-DE" smtClean="0"/>
+              <a:rPr lang="de-DE"/>
               <a:t>Textmasterformat bearbeiten</a:t>
             </a:r>
           </a:p>
@@ -2351,7 +2351,7 @@
           <a:p>
             <a:fld id="{3FB75DC4-049D-4A9B-B286-BF003F86F273}" type="datetimeFigureOut">
               <a:rPr lang="en-GB" smtClean="0"/>
-              <a:t>30/10/2021</a:t>
+              <a:t>23/06/2025</a:t>
             </a:fld>
             <a:endParaRPr lang="en-GB" dirty="0"/>
           </a:p>
@@ -2393,7 +2393,7 @@
           <a:p>
             <a:fld id="{28392D24-8B86-4B92-BF71-2898FDE196EB}" type="slidenum">
               <a:rPr lang="en-GB" smtClean="0"/>
-              <a:t>‹Nr.›</a:t>
+              <a:t>‹#›</a:t>
             </a:fld>
             <a:endParaRPr lang="en-GB" dirty="0"/>
           </a:p>
@@ -2460,7 +2460,7 @@
           <a:lstStyle/>
           <a:p>
             <a:r>
-              <a:rPr lang="de-DE" smtClean="0"/>
+              <a:rPr lang="de-DE"/>
               <a:t>Titelmasterformat durch Klicken bearbeiten</a:t>
             </a:r>
             <a:endParaRPr lang="en-GB"/>
@@ -2494,35 +2494,35 @@
           <a:p>
             <a:pPr lvl="0"/>
             <a:r>
-              <a:rPr lang="de-DE" smtClean="0"/>
+              <a:rPr lang="de-DE"/>
               <a:t>Textmasterformat bearbeiten</a:t>
             </a:r>
           </a:p>
           <a:p>
             <a:pPr lvl="1"/>
             <a:r>
-              <a:rPr lang="de-DE" smtClean="0"/>
+              <a:rPr lang="de-DE"/>
               <a:t>Zweite Ebene</a:t>
             </a:r>
           </a:p>
           <a:p>
             <a:pPr lvl="2"/>
             <a:r>
-              <a:rPr lang="de-DE" smtClean="0"/>
+              <a:rPr lang="de-DE"/>
               <a:t>Dritte Ebene</a:t>
             </a:r>
           </a:p>
           <a:p>
             <a:pPr lvl="3"/>
             <a:r>
-              <a:rPr lang="de-DE" smtClean="0"/>
+              <a:rPr lang="de-DE"/>
               <a:t>Vierte Ebene</a:t>
             </a:r>
           </a:p>
           <a:p>
             <a:pPr lvl="4"/>
             <a:r>
-              <a:rPr lang="de-DE" smtClean="0"/>
+              <a:rPr lang="de-DE"/>
               <a:t>Fünfte Ebene</a:t>
             </a:r>
             <a:endParaRPr lang="en-GB"/>
@@ -2564,7 +2564,7 @@
           <a:p>
             <a:fld id="{3FB75DC4-049D-4A9B-B286-BF003F86F273}" type="datetimeFigureOut">
               <a:rPr lang="en-GB" smtClean="0"/>
-              <a:t>30/10/2021</a:t>
+              <a:t>23/06/2025</a:t>
             </a:fld>
             <a:endParaRPr lang="en-GB" dirty="0"/>
           </a:p>
@@ -2642,7 +2642,7 @@
           <a:p>
             <a:fld id="{28392D24-8B86-4B92-BF71-2898FDE196EB}" type="slidenum">
               <a:rPr lang="en-GB" smtClean="0"/>
-              <a:t>‹Nr.›</a:t>
+              <a:t>‹#›</a:t>
             </a:fld>
             <a:endParaRPr lang="en-GB" dirty="0"/>
           </a:p>
@@ -3074,7 +3074,7 @@
           <a:lstStyle/>
           <a:p>
             <a:r>
-              <a:rPr lang="de-DE" sz="800" dirty="0" smtClean="0">
+              <a:rPr lang="de-DE" sz="800" dirty="0">
                 <a:solidFill>
                   <a:schemeClr val="bg1"/>
                 </a:solidFill>
@@ -3091,7 +3091,7 @@
       </p:sp>
       <p:pic>
         <p:nvPicPr>
-          <p:cNvPr id="1034" name="Picture 10" descr="Bild"/>
+          <p:cNvPr id="1034" name="Picture 10"/>
           <p:cNvPicPr>
             <a:picLocks noChangeAspect="1" noChangeArrowheads="1"/>
           </p:cNvPicPr>
@@ -3106,9 +3106,7 @@
             </a:extLst>
           </a:blip>
           <a:srcRect/>
-          <a:stretch>
-            <a:fillRect/>
-          </a:stretch>
+          <a:stretch/>
         </p:blipFill>
         <p:spPr bwMode="auto">
           <a:xfrm>
@@ -3119,15 +3117,6 @@
             <a:avLst/>
           </a:prstGeom>
           <a:noFill/>
-          <a:extLst>
-            <a:ext uri="{909E8E84-426E-40DD-AFC4-6F175D3DCCD1}">
-              <a14:hiddenFill xmlns:a14="http://schemas.microsoft.com/office/drawing/2010/main">
-                <a:solidFill>
-                  <a:srgbClr val="FFFFFF"/>
-                </a:solidFill>
-              </a14:hiddenFill>
-            </a:ext>
-          </a:extLst>
         </p:spPr>
       </p:pic>
       <p:sp>
@@ -3153,7 +3142,7 @@
           <a:lstStyle/>
           <a:p>
             <a:r>
-              <a:rPr lang="de-DE" sz="800" dirty="0" smtClean="0">
+              <a:rPr lang="de-DE" sz="800" dirty="0">
                 <a:solidFill>
                   <a:schemeClr val="bg1"/>
                 </a:solidFill>
@@ -3191,7 +3180,7 @@
           <a:lstStyle/>
           <a:p>
             <a:r>
-              <a:rPr lang="de-DE" sz="800" dirty="0" smtClean="0">
+              <a:rPr lang="de-DE" sz="800" dirty="0">
                 <a:solidFill>
                   <a:schemeClr val="bg1"/>
                 </a:solidFill>
@@ -3270,7 +3259,7 @@
           <a:lstStyle/>
           <a:p>
             <a:r>
-              <a:rPr lang="de-DE" sz="800" dirty="0" smtClean="0">
+              <a:rPr lang="de-DE" sz="800" dirty="0">
                 <a:solidFill>
                   <a:schemeClr val="bg1"/>
                 </a:solidFill>
@@ -3308,7 +3297,7 @@
           <a:lstStyle/>
           <a:p>
             <a:r>
-              <a:rPr lang="de-DE" sz="800" dirty="0" smtClean="0">
+              <a:rPr lang="de-DE" sz="800" dirty="0">
                 <a:solidFill>
                   <a:schemeClr val="bg1"/>
                 </a:solidFill>
@@ -3592,7 +3581,7 @@
           <a:lstStyle/>
           <a:p>
             <a:r>
-              <a:rPr lang="de-DE" sz="1100" dirty="0" smtClean="0">
+              <a:rPr lang="de-DE" sz="1100" dirty="0">
                 <a:solidFill>
                   <a:schemeClr val="bg1"/>
                 </a:solidFill>
@@ -3703,7 +3692,7 @@
           <a:p>
             <a:pPr algn="ctr"/>
             <a:r>
-              <a:rPr lang="de-DE" sz="800" dirty="0" smtClean="0">
+              <a:rPr lang="de-DE" sz="800" dirty="0">
                 <a:solidFill>
                   <a:schemeClr val="bg1"/>
                 </a:solidFill>
@@ -3714,18 +3703,13 @@
           <a:p>
             <a:pPr algn="ctr"/>
             <a:r>
-              <a:rPr lang="de-DE" sz="800" dirty="0" smtClean="0">
+              <a:rPr lang="de-DE" sz="800" dirty="0">
                 <a:solidFill>
                   <a:schemeClr val="bg1"/>
                 </a:solidFill>
               </a:rPr>
               <a:t>Version or Plugin</a:t>
             </a:r>
-            <a:endParaRPr lang="de-DE" sz="800" dirty="0">
-              <a:solidFill>
-                <a:schemeClr val="bg1"/>
-              </a:solidFill>
-            </a:endParaRPr>
           </a:p>
           <a:p>
             <a:pPr algn="ctr"/>
@@ -3735,15 +3719,7 @@
                   <a:schemeClr val="bg1"/>
                 </a:solidFill>
               </a:rPr>
-              <a:t>U</a:t>
-            </a:r>
-            <a:r>
-              <a:rPr lang="de-DE" sz="800" dirty="0" smtClean="0">
-                <a:solidFill>
-                  <a:schemeClr val="bg1"/>
-                </a:solidFill>
-              </a:rPr>
-              <a:t>pdates</a:t>
+              <a:t>Updates</a:t>
             </a:r>
             <a:endParaRPr lang="en-GB" sz="1000" dirty="0">
               <a:solidFill>
@@ -3877,7 +3853,7 @@
           <a:lstStyle/>
           <a:p>
             <a:r>
-              <a:rPr lang="de-DE" sz="800" dirty="0" smtClean="0">
+              <a:rPr lang="de-DE" sz="800" dirty="0">
                 <a:solidFill>
                   <a:schemeClr val="bg1"/>
                 </a:solidFill>
@@ -3915,7 +3891,7 @@
           <a:lstStyle/>
           <a:p>
             <a:r>
-              <a:rPr lang="de-DE" sz="800" dirty="0" smtClean="0">
+              <a:rPr lang="de-DE" sz="800" dirty="0">
                 <a:solidFill>
                   <a:schemeClr val="bg1"/>
                 </a:solidFill>
@@ -3994,7 +3970,7 @@
           <a:lstStyle/>
           <a:p>
             <a:r>
-              <a:rPr lang="de-DE" sz="800" dirty="0" smtClean="0">
+              <a:rPr lang="de-DE" sz="800" dirty="0">
                 <a:solidFill>
                   <a:schemeClr val="bg1"/>
                 </a:solidFill>
@@ -4068,7 +4044,7 @@
           <a:lstStyle/>
           <a:p>
             <a:r>
-              <a:rPr lang="de-DE" sz="800" dirty="0" smtClean="0">
+              <a:rPr lang="de-DE" sz="800" dirty="0">
                 <a:solidFill>
                   <a:schemeClr val="bg1"/>
                 </a:solidFill>
@@ -4147,7 +4123,7 @@
           <a:lstStyle/>
           <a:p>
             <a:r>
-              <a:rPr lang="de-DE" sz="800" dirty="0" smtClean="0">
+              <a:rPr lang="de-DE" sz="800" dirty="0">
                 <a:solidFill>
                   <a:schemeClr val="bg1"/>
                 </a:solidFill>
@@ -4320,7 +4296,7 @@
         <p:spPr>
           <a:xfrm>
             <a:off x="3359674" y="5124451"/>
-            <a:ext cx="1034257" cy="215444"/>
+            <a:ext cx="1808508" cy="246221"/>
           </a:xfrm>
           <a:prstGeom prst="rect">
             <a:avLst/>
@@ -4334,18 +4310,13 @@
           <a:lstStyle/>
           <a:p>
             <a:r>
-              <a:rPr lang="de-DE" sz="800" dirty="0" smtClean="0">
+              <a:rPr lang="en-GB" sz="1000" dirty="0">
                 <a:solidFill>
                   <a:schemeClr val="bg1"/>
                 </a:solidFill>
               </a:rPr>
-              <a:t>Manual deployment</a:t>
-            </a:r>
-            <a:endParaRPr lang="en-GB" sz="800" dirty="0">
-              <a:solidFill>
-                <a:schemeClr val="bg1"/>
-              </a:solidFill>
-            </a:endParaRPr>
+              <a:t>Automated staged deployment</a:t>
+            </a:r>
           </a:p>
         </p:txBody>
       </p:sp>
@@ -4394,7 +4365,7 @@
         <p:spPr>
           <a:xfrm>
             <a:off x="4576735" y="2458516"/>
-            <a:ext cx="623889" cy="215444"/>
+            <a:ext cx="1808508" cy="246221"/>
           </a:xfrm>
           <a:prstGeom prst="rect">
             <a:avLst/>
@@ -4408,18 +4379,13 @@
           <a:lstStyle/>
           <a:p>
             <a:r>
-              <a:rPr lang="de-DE" sz="800" dirty="0" smtClean="0">
+              <a:rPr lang="en-GB" sz="1000" dirty="0">
                 <a:solidFill>
                   <a:schemeClr val="bg1"/>
                 </a:solidFill>
               </a:rPr>
-              <a:t>CI Pipeline</a:t>
-            </a:r>
-            <a:endParaRPr lang="en-GB" sz="1000" dirty="0">
-              <a:solidFill>
-                <a:schemeClr val="bg1"/>
-              </a:solidFill>
-            </a:endParaRPr>
+              <a:t>Automated staged deployment</a:t>
+            </a:r>
           </a:p>
         </p:txBody>
       </p:sp>
@@ -4657,7 +4623,7 @@
           <a:lstStyle/>
           <a:p>
             <a:r>
-              <a:rPr lang="de-DE" sz="800" dirty="0" smtClean="0">
+              <a:rPr lang="de-DE" sz="800" dirty="0">
                 <a:solidFill>
                   <a:schemeClr val="bg1"/>
                 </a:solidFill>
@@ -4767,7 +4733,7 @@
           <a:p>
             <a:pPr algn="ctr"/>
             <a:r>
-              <a:rPr lang="de-DE" sz="800" dirty="0" smtClean="0">
+              <a:rPr lang="de-DE" sz="800" dirty="0">
                 <a:solidFill>
                   <a:schemeClr val="bg1"/>
                 </a:solidFill>
@@ -4778,7 +4744,7 @@
           <a:p>
             <a:pPr algn="ctr"/>
             <a:r>
-              <a:rPr lang="de-DE" sz="800" dirty="0" smtClean="0">
+              <a:rPr lang="de-DE" sz="800" dirty="0">
                 <a:solidFill>
                   <a:schemeClr val="bg1"/>
                 </a:solidFill>
@@ -4924,7 +4890,7 @@
           <a:p>
             <a:pPr algn="ctr"/>
             <a:r>
-              <a:rPr lang="de-DE" sz="800" dirty="0" smtClean="0">
+              <a:rPr lang="de-DE" sz="800" dirty="0">
                 <a:solidFill>
                   <a:schemeClr val="bg1"/>
                 </a:solidFill>
@@ -4935,7 +4901,7 @@
           <a:p>
             <a:pPr algn="ctr"/>
             <a:r>
-              <a:rPr lang="de-DE" sz="800" dirty="0" smtClean="0">
+              <a:rPr lang="de-DE" sz="800" dirty="0">
                 <a:solidFill>
                   <a:schemeClr val="bg1"/>
                 </a:solidFill>
@@ -4973,7 +4939,7 @@
           <a:lstStyle/>
           <a:p>
             <a:r>
-              <a:rPr lang="de-DE" sz="800" dirty="0" smtClean="0">
+              <a:rPr lang="de-DE" sz="800" dirty="0">
                 <a:solidFill>
                   <a:schemeClr val="bg1"/>
                 </a:solidFill>
@@ -5011,7 +4977,7 @@
           <a:lstStyle/>
           <a:p>
             <a:r>
-              <a:rPr lang="de-DE" sz="800" dirty="0" smtClean="0">
+              <a:rPr lang="de-DE" sz="800" dirty="0">
                 <a:solidFill>
                   <a:schemeClr val="bg1"/>
                 </a:solidFill>
@@ -5049,7 +5015,7 @@
           <a:lstStyle/>
           <a:p>
             <a:r>
-              <a:rPr lang="de-DE" sz="800" dirty="0" smtClean="0">
+              <a:rPr lang="de-DE" sz="800" dirty="0">
                 <a:solidFill>
                   <a:schemeClr val="bg1"/>
                 </a:solidFill>
@@ -5087,7 +5053,7 @@
           <a:lstStyle/>
           <a:p>
             <a:r>
-              <a:rPr lang="de-DE" sz="800" dirty="0" smtClean="0">
+              <a:rPr lang="de-DE" sz="800" dirty="0">
                 <a:solidFill>
                   <a:schemeClr val="bg1"/>
                 </a:solidFill>
@@ -5192,7 +5158,7 @@
           <a:p>
             <a:pPr algn="ctr"/>
             <a:r>
-              <a:rPr lang="de-DE" sz="800" dirty="0" smtClean="0">
+              <a:rPr lang="de-DE" sz="800" dirty="0">
                 <a:solidFill>
                   <a:schemeClr val="bg1"/>
                 </a:solidFill>
@@ -5203,7 +5169,7 @@
           <a:p>
             <a:pPr algn="ctr"/>
             <a:r>
-              <a:rPr lang="de-DE" sz="800" dirty="0" smtClean="0">
+              <a:rPr lang="de-DE" sz="800" dirty="0">
                 <a:solidFill>
                   <a:schemeClr val="bg1"/>
                 </a:solidFill>
@@ -5346,7 +5312,7 @@
           <a:p>
             <a:pPr algn="ctr"/>
             <a:r>
-              <a:rPr lang="de-DE" sz="800" dirty="0" smtClean="0">
+              <a:rPr lang="de-DE" sz="800" dirty="0">
                 <a:solidFill>
                   <a:schemeClr val="bg1"/>
                 </a:solidFill>
@@ -5357,7 +5323,7 @@
           <a:p>
             <a:pPr algn="ctr"/>
             <a:r>
-              <a:rPr lang="de-DE" sz="800" dirty="0" smtClean="0">
+              <a:rPr lang="de-DE" sz="800" dirty="0">
                 <a:solidFill>
                   <a:schemeClr val="bg1"/>
                 </a:solidFill>
@@ -5632,7 +5598,7 @@
         <p:spPr>
           <a:xfrm>
             <a:off x="1541578" y="3773808"/>
-            <a:ext cx="728084" cy="261610"/>
+            <a:ext cx="574196" cy="261610"/>
           </a:xfrm>
           <a:prstGeom prst="rect">
             <a:avLst/>
@@ -5646,12 +5612,12 @@
           <a:lstStyle/>
           <a:p>
             <a:r>
-              <a:rPr lang="de-DE" sz="1100" dirty="0" smtClean="0">
+              <a:rPr lang="de-DE" sz="1100" dirty="0">
                 <a:solidFill>
                   <a:schemeClr val="bg1"/>
                 </a:solidFill>
               </a:rPr>
-              <a:t>Bitbucket</a:t>
+              <a:t>Github</a:t>
             </a:r>
             <a:endParaRPr lang="en-GB" sz="1400" dirty="0">
               <a:solidFill>
@@ -5762,7 +5728,7 @@
           <a:lstStyle/>
           <a:p>
             <a:r>
-              <a:rPr lang="de-DE" sz="800" dirty="0" smtClean="0">
+              <a:rPr lang="de-DE" sz="800" dirty="0">
                 <a:solidFill>
                   <a:schemeClr val="bg1"/>
                 </a:solidFill>
@@ -5800,7 +5766,7 @@
           <a:lstStyle/>
           <a:p>
             <a:r>
-              <a:rPr lang="de-DE" sz="800" dirty="0" smtClean="0">
+              <a:rPr lang="de-DE" sz="800" dirty="0">
                 <a:solidFill>
                   <a:schemeClr val="bg1"/>
                 </a:solidFill>
@@ -6043,7 +6009,7 @@
           <a:lstStyle/>
           <a:p>
             <a:r>
-              <a:rPr lang="de-DE" sz="800" dirty="0" smtClean="0">
+              <a:rPr lang="de-DE" sz="800" dirty="0">
                 <a:solidFill>
                   <a:schemeClr val="bg1"/>
                 </a:solidFill>
@@ -6119,7 +6085,7 @@
           <a:p>
             <a:pPr algn="ctr"/>
             <a:r>
-              <a:rPr lang="de-DE" sz="800" dirty="0" smtClean="0">
+              <a:rPr lang="de-DE" sz="800" dirty="0">
                 <a:solidFill>
                   <a:schemeClr val="bg1"/>
                 </a:solidFill>
@@ -6253,7 +6219,7 @@
           <a:lstStyle/>
           <a:p>
             <a:r>
-              <a:rPr lang="de-DE" sz="800" dirty="0" smtClean="0">
+              <a:rPr lang="de-DE" sz="800" dirty="0">
                 <a:solidFill>
                   <a:schemeClr val="bg1"/>
                 </a:solidFill>
@@ -6263,7 +6229,7 @@
           </a:p>
           <a:p>
             <a:r>
-              <a:rPr lang="de-DE" sz="800" dirty="0" smtClean="0">
+              <a:rPr lang="de-DE" sz="800" dirty="0">
                 <a:solidFill>
                   <a:schemeClr val="bg1"/>
                 </a:solidFill>
@@ -6301,7 +6267,7 @@
           <a:lstStyle/>
           <a:p>
             <a:r>
-              <a:rPr lang="de-DE" sz="2400" dirty="0" smtClean="0">
+              <a:rPr lang="de-DE" sz="2400" dirty="0">
                 <a:solidFill>
                   <a:schemeClr val="bg1"/>
                 </a:solidFill>
@@ -6544,7 +6510,7 @@
           <a:lstStyle/>
           <a:p>
             <a:r>
-              <a:rPr lang="de-DE" sz="800" dirty="0" smtClean="0">
+              <a:rPr lang="de-DE" sz="800" dirty="0">
                 <a:solidFill>
                   <a:schemeClr val="bg1"/>
                 </a:solidFill>
@@ -6620,7 +6586,7 @@
           <a:p>
             <a:pPr algn="ctr"/>
             <a:r>
-              <a:rPr lang="de-DE" sz="800" dirty="0" smtClean="0">
+              <a:rPr lang="de-DE" sz="800" dirty="0">
                 <a:solidFill>
                   <a:schemeClr val="bg1"/>
                 </a:solidFill>
@@ -6638,23 +6604,15 @@
               </a:rPr>
               <a:t>&amp;</a:t>
             </a:r>
-            <a:r>
-              <a:rPr lang="de-DE" sz="800" dirty="0" smtClean="0">
-                <a:solidFill>
-                  <a:schemeClr val="bg1"/>
-                </a:solidFill>
-              </a:rPr>
-              <a:t/>
-            </a:r>
             <a:br>
-              <a:rPr lang="de-DE" sz="800" dirty="0" smtClean="0">
+              <a:rPr lang="de-DE" sz="800" dirty="0">
                 <a:solidFill>
                   <a:schemeClr val="bg1"/>
                 </a:solidFill>
               </a:rPr>
             </a:br>
             <a:r>
-              <a:rPr lang="de-DE" sz="800" dirty="0" smtClean="0">
+              <a:rPr lang="de-DE" sz="800" dirty="0">
                 <a:solidFill>
                   <a:schemeClr val="bg1"/>
                 </a:solidFill>
@@ -6720,13 +6678,6 @@
   <p:clrMapOvr>
     <a:masterClrMapping/>
   </p:clrMapOvr>
-  <p:timing>
-    <p:tnLst>
-      <p:par>
-        <p:cTn id="1" dur="indefinite" restart="never" nodeType="tmRoot"/>
-      </p:par>
-    </p:tnLst>
-  </p:timing>
 </p:sld>
 </file>
 
